--- a/figures/figure_02.pptx
+++ b/figures/figure_02.pptx
@@ -2,12 +2,12 @@
 <file path=ppt/presentation.xml><?xml version="1.0" encoding="utf-8"?>
 <p:presentation xmlns:a="http://schemas.openxmlformats.org/drawingml/2006/main" xmlns:r="http://schemas.openxmlformats.org/officeDocument/2006/relationships" xmlns:p="http://schemas.openxmlformats.org/presentationml/2006/main" saveSubsetFonts="1">
   <p:sldMasterIdLst>
-    <p:sldMasterId id="2147483672" r:id="rId1"/>
+    <p:sldMasterId id="2147483684" r:id="rId1"/>
   </p:sldMasterIdLst>
   <p:sldIdLst>
     <p:sldId id="256" r:id="rId2"/>
   </p:sldIdLst>
-  <p:sldSz cx="6208713" cy="2743200"/>
+  <p:sldSz cx="6272213" cy="2835275"/>
   <p:notesSz cx="6858000" cy="9144000"/>
   <p:defaultTextStyle>
     <a:defPPr>
@@ -115,7 +115,7 @@
 <file path=ppt/revisionInfo.xml><?xml version="1.0" encoding="utf-8"?>
 <p1510:revInfo xmlns:a="http://schemas.openxmlformats.org/drawingml/2006/main" xmlns:r="http://schemas.openxmlformats.org/officeDocument/2006/relationships" xmlns:p1510="http://schemas.microsoft.com/office/powerpoint/2015/10/main">
   <p1510:revLst>
-    <p1510:client id="{F41769D2-4F2C-47C3-9BA4-73BDE2B094D1}" v="3" dt="2026-09-03T16:44:16.605"/>
+    <p1510:client id="{F41769D2-4F2C-47C3-9BA4-73BDE2B094D1}" v="4" dt="2026-09-17T16:20:53.112"/>
   </p1510:revLst>
 </p1510:revInfo>
 </file>
@@ -125,46 +125,30 @@
   <pc:docChgLst>
     <pc:chgData name="Gilbert, Neil" userId="37be9f5c-8f28-415b-96d6-624acf93bb3f" providerId="ADAL" clId="{18ED56B6-1921-416C-9A28-3F6F3C8390B5}"/>
     <pc:docChg chg="undo custSel modSld">
-      <pc:chgData name="Gilbert, Neil" userId="37be9f5c-8f28-415b-96d6-624acf93bb3f" providerId="ADAL" clId="{18ED56B6-1921-416C-9A28-3F6F3C8390B5}" dt="2026-09-03T17:23:01.901" v="102" actId="167"/>
+      <pc:chgData name="Gilbert, Neil" userId="37be9f5c-8f28-415b-96d6-624acf93bb3f" providerId="ADAL" clId="{18ED56B6-1921-416C-9A28-3F6F3C8390B5}" dt="2026-09-17T16:20:53.112" v="125"/>
       <pc:docMkLst>
         <pc:docMk/>
       </pc:docMkLst>
       <pc:sldChg chg="addSp delSp modSp mod">
-        <pc:chgData name="Gilbert, Neil" userId="37be9f5c-8f28-415b-96d6-624acf93bb3f" providerId="ADAL" clId="{18ED56B6-1921-416C-9A28-3F6F3C8390B5}" dt="2026-09-03T17:23:01.901" v="102" actId="167"/>
+        <pc:chgData name="Gilbert, Neil" userId="37be9f5c-8f28-415b-96d6-624acf93bb3f" providerId="ADAL" clId="{18ED56B6-1921-416C-9A28-3F6F3C8390B5}" dt="2026-09-17T16:20:53.112" v="125"/>
         <pc:sldMkLst>
           <pc:docMk/>
           <pc:sldMk cId="470603763" sldId="256"/>
         </pc:sldMkLst>
-        <pc:spChg chg="mod">
-          <ac:chgData name="Gilbert, Neil" userId="37be9f5c-8f28-415b-96d6-624acf93bb3f" providerId="ADAL" clId="{18ED56B6-1921-416C-9A28-3F6F3C8390B5}" dt="2026-09-03T16:43:56.512" v="47"/>
+        <pc:spChg chg="add mod">
+          <ac:chgData name="Gilbert, Neil" userId="37be9f5c-8f28-415b-96d6-624acf93bb3f" providerId="ADAL" clId="{18ED56B6-1921-416C-9A28-3F6F3C8390B5}" dt="2026-09-17T16:19:22.440" v="114" actId="164"/>
           <ac:spMkLst>
             <pc:docMk/>
             <pc:sldMk cId="470603763" sldId="256"/>
-            <ac:spMk id="5" creationId="{F2303B2F-7855-2234-5DCE-49175B3E485C}"/>
+            <ac:spMk id="3" creationId="{85F16C4B-9537-1AF0-FDC9-59BF9F4F5919}"/>
           </ac:spMkLst>
         </pc:spChg>
-        <pc:spChg chg="mod">
-          <ac:chgData name="Gilbert, Neil" userId="37be9f5c-8f28-415b-96d6-624acf93bb3f" providerId="ADAL" clId="{18ED56B6-1921-416C-9A28-3F6F3C8390B5}" dt="2026-09-03T16:43:56.512" v="47"/>
+        <pc:spChg chg="add mod">
+          <ac:chgData name="Gilbert, Neil" userId="37be9f5c-8f28-415b-96d6-624acf93bb3f" providerId="ADAL" clId="{18ED56B6-1921-416C-9A28-3F6F3C8390B5}" dt="2026-09-17T16:19:22.440" v="114" actId="164"/>
           <ac:spMkLst>
             <pc:docMk/>
             <pc:sldMk cId="470603763" sldId="256"/>
-            <ac:spMk id="6" creationId="{23D28CC5-98A5-7313-8144-8F4C609648A5}"/>
-          </ac:spMkLst>
-        </pc:spChg>
-        <pc:spChg chg="mod">
-          <ac:chgData name="Gilbert, Neil" userId="37be9f5c-8f28-415b-96d6-624acf93bb3f" providerId="ADAL" clId="{18ED56B6-1921-416C-9A28-3F6F3C8390B5}" dt="2026-09-03T16:43:56.512" v="47"/>
-          <ac:spMkLst>
-            <pc:docMk/>
-            <pc:sldMk cId="470603763" sldId="256"/>
-            <ac:spMk id="7" creationId="{7C455A33-8E9F-43F4-ECC8-63F2B41EDAF9}"/>
-          </ac:spMkLst>
-        </pc:spChg>
-        <pc:spChg chg="mod">
-          <ac:chgData name="Gilbert, Neil" userId="37be9f5c-8f28-415b-96d6-624acf93bb3f" providerId="ADAL" clId="{18ED56B6-1921-416C-9A28-3F6F3C8390B5}" dt="2026-09-03T16:43:56.512" v="47"/>
-          <ac:spMkLst>
-            <pc:docMk/>
-            <pc:sldMk cId="470603763" sldId="256"/>
-            <ac:spMk id="8" creationId="{0046218C-8D04-61E7-04F4-ABDCFCC46A32}"/>
+            <ac:spMk id="5" creationId="{D13F5E40-BA00-6966-FFE8-60CA82EF3209}"/>
           </ac:spMkLst>
         </pc:spChg>
         <pc:spChg chg="mod">
@@ -176,27 +160,43 @@
           </ac:spMkLst>
         </pc:spChg>
         <pc:spChg chg="mod">
-          <ac:chgData name="Gilbert, Neil" userId="37be9f5c-8f28-415b-96d6-624acf93bb3f" providerId="ADAL" clId="{18ED56B6-1921-416C-9A28-3F6F3C8390B5}" dt="2026-09-03T16:43:39.183" v="40" actId="1036"/>
+          <ac:chgData name="Gilbert, Neil" userId="37be9f5c-8f28-415b-96d6-624acf93bb3f" providerId="ADAL" clId="{18ED56B6-1921-416C-9A28-3F6F3C8390B5}" dt="2026-09-17T16:19:37.947" v="116"/>
           <ac:spMkLst>
             <pc:docMk/>
             <pc:sldMk cId="470603763" sldId="256"/>
-            <ac:spMk id="16" creationId="{F2303B2F-7855-2234-5DCE-49175B3E485C}"/>
+            <ac:spMk id="14" creationId="{85F16C4B-9537-1AF0-FDC9-59BF9F4F5919}"/>
           </ac:spMkLst>
         </pc:spChg>
         <pc:spChg chg="mod">
-          <ac:chgData name="Gilbert, Neil" userId="37be9f5c-8f28-415b-96d6-624acf93bb3f" providerId="ADAL" clId="{18ED56B6-1921-416C-9A28-3F6F3C8390B5}" dt="2026-09-03T16:43:44.782" v="45" actId="1037"/>
+          <ac:chgData name="Gilbert, Neil" userId="37be9f5c-8f28-415b-96d6-624acf93bb3f" providerId="ADAL" clId="{18ED56B6-1921-416C-9A28-3F6F3C8390B5}" dt="2026-09-17T16:19:37.947" v="116"/>
           <ac:spMkLst>
             <pc:docMk/>
             <pc:sldMk cId="470603763" sldId="256"/>
-            <ac:spMk id="17" creationId="{23D28CC5-98A5-7313-8144-8F4C609648A5}"/>
+            <ac:spMk id="15" creationId="{D13F5E40-BA00-6966-FFE8-60CA82EF3209}"/>
           </ac:spMkLst>
         </pc:spChg>
         <pc:spChg chg="mod">
-          <ac:chgData name="Gilbert, Neil" userId="37be9f5c-8f28-415b-96d6-624acf93bb3f" providerId="ADAL" clId="{18ED56B6-1921-416C-9A28-3F6F3C8390B5}" dt="2026-09-03T16:43:14.878" v="4" actId="1038"/>
+          <ac:chgData name="Gilbert, Neil" userId="37be9f5c-8f28-415b-96d6-624acf93bb3f" providerId="ADAL" clId="{18ED56B6-1921-416C-9A28-3F6F3C8390B5}" dt="2026-09-17T16:19:37.947" v="116"/>
           <ac:spMkLst>
             <pc:docMk/>
             <pc:sldMk cId="470603763" sldId="256"/>
-            <ac:spMk id="19" creationId="{0046218C-8D04-61E7-04F4-ABDCFCC46A32}"/>
+            <ac:spMk id="17" creationId="{F2303B2F-7855-2234-5DCE-49175B3E485C}"/>
+          </ac:spMkLst>
+        </pc:spChg>
+        <pc:spChg chg="mod">
+          <ac:chgData name="Gilbert, Neil" userId="37be9f5c-8f28-415b-96d6-624acf93bb3f" providerId="ADAL" clId="{18ED56B6-1921-416C-9A28-3F6F3C8390B5}" dt="2026-09-17T16:19:37.947" v="116"/>
+          <ac:spMkLst>
+            <pc:docMk/>
+            <pc:sldMk cId="470603763" sldId="256"/>
+            <ac:spMk id="18" creationId="{23D28CC5-98A5-7313-8144-8F4C609648A5}"/>
+          </ac:spMkLst>
+        </pc:spChg>
+        <pc:spChg chg="mod">
+          <ac:chgData name="Gilbert, Neil" userId="37be9f5c-8f28-415b-96d6-624acf93bb3f" providerId="ADAL" clId="{18ED56B6-1921-416C-9A28-3F6F3C8390B5}" dt="2026-09-17T16:19:37.947" v="116"/>
+          <ac:spMkLst>
+            <pc:docMk/>
+            <pc:sldMk cId="470603763" sldId="256"/>
+            <ac:spMk id="19" creationId="{7C455A33-8E9F-43F4-ECC8-63F2B41EDAF9}"/>
           </ac:spMkLst>
         </pc:spChg>
         <pc:spChg chg="mod">
@@ -223,64 +223,120 @@
             <ac:spMk id="22" creationId="{0046218C-8D04-61E7-04F4-ABDCFCC46A32}"/>
           </ac:spMkLst>
         </pc:spChg>
+        <pc:spChg chg="mod">
+          <ac:chgData name="Gilbert, Neil" userId="37be9f5c-8f28-415b-96d6-624acf93bb3f" providerId="ADAL" clId="{18ED56B6-1921-416C-9A28-3F6F3C8390B5}" dt="2026-09-17T16:19:37.947" v="116"/>
+          <ac:spMkLst>
+            <pc:docMk/>
+            <pc:sldMk cId="470603763" sldId="256"/>
+            <ac:spMk id="23" creationId="{0046218C-8D04-61E7-04F4-ABDCFCC46A32}"/>
+          </ac:spMkLst>
+        </pc:spChg>
+        <pc:spChg chg="add del mod">
+          <ac:chgData name="Gilbert, Neil" userId="37be9f5c-8f28-415b-96d6-624acf93bb3f" providerId="ADAL" clId="{18ED56B6-1921-416C-9A28-3F6F3C8390B5}" dt="2026-09-17T16:20:33.896" v="123" actId="478"/>
+          <ac:spMkLst>
+            <pc:docMk/>
+            <pc:sldMk cId="470603763" sldId="256"/>
+            <ac:spMk id="25" creationId="{B2699F61-2467-F5FD-4A0A-CF8A7BBF8476}"/>
+          </ac:spMkLst>
+        </pc:spChg>
+        <pc:spChg chg="mod">
+          <ac:chgData name="Gilbert, Neil" userId="37be9f5c-8f28-415b-96d6-624acf93bb3f" providerId="ADAL" clId="{18ED56B6-1921-416C-9A28-3F6F3C8390B5}" dt="2026-09-17T16:20:53.112" v="125"/>
+          <ac:spMkLst>
+            <pc:docMk/>
+            <pc:sldMk cId="470603763" sldId="256"/>
+            <ac:spMk id="29" creationId="{85F16C4B-9537-1AF0-FDC9-59BF9F4F5919}"/>
+          </ac:spMkLst>
+        </pc:spChg>
+        <pc:spChg chg="mod">
+          <ac:chgData name="Gilbert, Neil" userId="37be9f5c-8f28-415b-96d6-624acf93bb3f" providerId="ADAL" clId="{18ED56B6-1921-416C-9A28-3F6F3C8390B5}" dt="2026-09-17T16:20:53.112" v="125"/>
+          <ac:spMkLst>
+            <pc:docMk/>
+            <pc:sldMk cId="470603763" sldId="256"/>
+            <ac:spMk id="30" creationId="{D13F5E40-BA00-6966-FFE8-60CA82EF3209}"/>
+          </ac:spMkLst>
+        </pc:spChg>
+        <pc:spChg chg="mod">
+          <ac:chgData name="Gilbert, Neil" userId="37be9f5c-8f28-415b-96d6-624acf93bb3f" providerId="ADAL" clId="{18ED56B6-1921-416C-9A28-3F6F3C8390B5}" dt="2026-09-17T16:20:53.112" v="125"/>
+          <ac:spMkLst>
+            <pc:docMk/>
+            <pc:sldMk cId="470603763" sldId="256"/>
+            <ac:spMk id="32" creationId="{F2303B2F-7855-2234-5DCE-49175B3E485C}"/>
+          </ac:spMkLst>
+        </pc:spChg>
+        <pc:spChg chg="mod">
+          <ac:chgData name="Gilbert, Neil" userId="37be9f5c-8f28-415b-96d6-624acf93bb3f" providerId="ADAL" clId="{18ED56B6-1921-416C-9A28-3F6F3C8390B5}" dt="2026-09-17T16:20:53.112" v="125"/>
+          <ac:spMkLst>
+            <pc:docMk/>
+            <pc:sldMk cId="470603763" sldId="256"/>
+            <ac:spMk id="33" creationId="{23D28CC5-98A5-7313-8144-8F4C609648A5}"/>
+          </ac:spMkLst>
+        </pc:spChg>
+        <pc:spChg chg="mod">
+          <ac:chgData name="Gilbert, Neil" userId="37be9f5c-8f28-415b-96d6-624acf93bb3f" providerId="ADAL" clId="{18ED56B6-1921-416C-9A28-3F6F3C8390B5}" dt="2026-09-17T16:20:53.112" v="125"/>
+          <ac:spMkLst>
+            <pc:docMk/>
+            <pc:sldMk cId="470603763" sldId="256"/>
+            <ac:spMk id="34" creationId="{7C455A33-8E9F-43F4-ECC8-63F2B41EDAF9}"/>
+          </ac:spMkLst>
+        </pc:spChg>
+        <pc:spChg chg="mod">
+          <ac:chgData name="Gilbert, Neil" userId="37be9f5c-8f28-415b-96d6-624acf93bb3f" providerId="ADAL" clId="{18ED56B6-1921-416C-9A28-3F6F3C8390B5}" dt="2026-09-17T16:20:53.112" v="125"/>
+          <ac:spMkLst>
+            <pc:docMk/>
+            <pc:sldMk cId="470603763" sldId="256"/>
+            <ac:spMk id="35" creationId="{0046218C-8D04-61E7-04F4-ABDCFCC46A32}"/>
+          </ac:spMkLst>
+        </pc:spChg>
         <pc:grpChg chg="add del mod">
-          <ac:chgData name="Gilbert, Neil" userId="37be9f5c-8f28-415b-96d6-624acf93bb3f" providerId="ADAL" clId="{18ED56B6-1921-416C-9A28-3F6F3C8390B5}" dt="2026-09-03T16:44:05.350" v="48" actId="21"/>
+          <ac:chgData name="Gilbert, Neil" userId="37be9f5c-8f28-415b-96d6-624acf93bb3f" providerId="ADAL" clId="{18ED56B6-1921-416C-9A28-3F6F3C8390B5}" dt="2026-09-17T16:19:36.621" v="115" actId="21"/>
           <ac:grpSpMkLst>
             <pc:docMk/>
             <pc:sldMk cId="470603763" sldId="256"/>
-            <ac:grpSpMk id="2" creationId="{7193D5A7-DBCC-74DE-21F4-FFC20B0F4636}"/>
+            <ac:grpSpMk id="6" creationId="{C414198B-DF3E-8F1E-EC61-C138F684EEE4}"/>
+          </ac:grpSpMkLst>
+        </pc:grpChg>
+        <pc:grpChg chg="add del mod">
+          <ac:chgData name="Gilbert, Neil" userId="37be9f5c-8f28-415b-96d6-624acf93bb3f" providerId="ADAL" clId="{18ED56B6-1921-416C-9A28-3F6F3C8390B5}" dt="2026-09-17T16:20:36.369" v="124" actId="21"/>
+          <ac:grpSpMkLst>
+            <pc:docMk/>
+            <pc:sldMk cId="470603763" sldId="256"/>
+            <ac:grpSpMk id="8" creationId="{C414198B-DF3E-8F1E-EC61-C138F684EEE4}"/>
           </ac:grpSpMkLst>
         </pc:grpChg>
         <pc:grpChg chg="add mod">
-          <ac:chgData name="Gilbert, Neil" userId="37be9f5c-8f28-415b-96d6-624acf93bb3f" providerId="ADAL" clId="{18ED56B6-1921-416C-9A28-3F6F3C8390B5}" dt="2026-09-03T16:44:16.605" v="49"/>
+          <ac:chgData name="Gilbert, Neil" userId="37be9f5c-8f28-415b-96d6-624acf93bb3f" providerId="ADAL" clId="{18ED56B6-1921-416C-9A28-3F6F3C8390B5}" dt="2026-09-17T16:19:22.440" v="114" actId="164"/>
           <ac:grpSpMkLst>
             <pc:docMk/>
             <pc:sldMk cId="470603763" sldId="256"/>
             <ac:grpSpMk id="9" creationId="{7193D5A7-DBCC-74DE-21F4-FFC20B0F4636}"/>
           </ac:grpSpMkLst>
         </pc:grpChg>
-        <pc:grpChg chg="del">
-          <ac:chgData name="Gilbert, Neil" userId="37be9f5c-8f28-415b-96d6-624acf93bb3f" providerId="ADAL" clId="{18ED56B6-1921-416C-9A28-3F6F3C8390B5}" dt="2026-09-03T16:43:55.450" v="46" actId="21"/>
+        <pc:grpChg chg="mod">
+          <ac:chgData name="Gilbert, Neil" userId="37be9f5c-8f28-415b-96d6-624acf93bb3f" providerId="ADAL" clId="{18ED56B6-1921-416C-9A28-3F6F3C8390B5}" dt="2026-09-17T16:19:37.947" v="116"/>
           <ac:grpSpMkLst>
             <pc:docMk/>
             <pc:sldMk cId="470603763" sldId="256"/>
             <ac:grpSpMk id="13" creationId="{7193D5A7-DBCC-74DE-21F4-FFC20B0F4636}"/>
           </ac:grpSpMkLst>
         </pc:grpChg>
-        <pc:picChg chg="add del mod ord">
-          <ac:chgData name="Gilbert, Neil" userId="37be9f5c-8f28-415b-96d6-624acf93bb3f" providerId="ADAL" clId="{18ED56B6-1921-416C-9A28-3F6F3C8390B5}" dt="2026-09-03T17:11:01.919" v="93" actId="478"/>
-          <ac:picMkLst>
+        <pc:grpChg chg="add mod">
+          <ac:chgData name="Gilbert, Neil" userId="37be9f5c-8f28-415b-96d6-624acf93bb3f" providerId="ADAL" clId="{18ED56B6-1921-416C-9A28-3F6F3C8390B5}" dt="2026-09-17T16:20:53.112" v="125"/>
+          <ac:grpSpMkLst>
             <pc:docMk/>
             <pc:sldMk cId="470603763" sldId="256"/>
-            <ac:picMk id="3" creationId="{02252136-6456-75C1-2297-0B609F63FA7D}"/>
-          </ac:picMkLst>
-        </pc:picChg>
-        <pc:picChg chg="mod">
-          <ac:chgData name="Gilbert, Neil" userId="37be9f5c-8f28-415b-96d6-624acf93bb3f" providerId="ADAL" clId="{18ED56B6-1921-416C-9A28-3F6F3C8390B5}" dt="2026-09-03T16:43:56.512" v="47"/>
-          <ac:picMkLst>
+            <ac:grpSpMk id="26" creationId="{C414198B-DF3E-8F1E-EC61-C138F684EEE4}"/>
+          </ac:grpSpMkLst>
+        </pc:grpChg>
+        <pc:grpChg chg="mod">
+          <ac:chgData name="Gilbert, Neil" userId="37be9f5c-8f28-415b-96d6-624acf93bb3f" providerId="ADAL" clId="{18ED56B6-1921-416C-9A28-3F6F3C8390B5}" dt="2026-09-17T16:20:53.112" v="125"/>
+          <ac:grpSpMkLst>
             <pc:docMk/>
             <pc:sldMk cId="470603763" sldId="256"/>
-            <ac:picMk id="3" creationId="{1A3D6F70-6D77-1AE7-42F9-DA3BE6DA71F6}"/>
-          </ac:picMkLst>
-        </pc:picChg>
-        <pc:picChg chg="mod">
-          <ac:chgData name="Gilbert, Neil" userId="37be9f5c-8f28-415b-96d6-624acf93bb3f" providerId="ADAL" clId="{18ED56B6-1921-416C-9A28-3F6F3C8390B5}" dt="2026-09-03T16:43:56.512" v="47"/>
-          <ac:picMkLst>
-            <pc:docMk/>
-            <pc:sldMk cId="470603763" sldId="256"/>
-            <ac:picMk id="4" creationId="{E25FA32C-2262-3484-686E-583ADA0D3F9A}"/>
-          </ac:picMkLst>
-        </pc:picChg>
-        <pc:picChg chg="add del mod ord">
-          <ac:chgData name="Gilbert, Neil" userId="37be9f5c-8f28-415b-96d6-624acf93bb3f" providerId="ADAL" clId="{18ED56B6-1921-416C-9A28-3F6F3C8390B5}" dt="2026-09-03T17:22:40.917" v="98" actId="478"/>
-          <ac:picMkLst>
-            <pc:docMk/>
-            <pc:sldMk cId="470603763" sldId="256"/>
-            <ac:picMk id="5" creationId="{D372136B-27FF-1CA8-B003-1671CF94057F}"/>
-          </ac:picMkLst>
-        </pc:picChg>
+            <ac:grpSpMk id="28" creationId="{7193D5A7-DBCC-74DE-21F4-FFC20B0F4636}"/>
+          </ac:grpSpMkLst>
+        </pc:grpChg>
         <pc:picChg chg="add mod ord">
-          <ac:chgData name="Gilbert, Neil" userId="37be9f5c-8f28-415b-96d6-624acf93bb3f" providerId="ADAL" clId="{18ED56B6-1921-416C-9A28-3F6F3C8390B5}" dt="2026-09-03T17:23:01.901" v="102" actId="167"/>
+          <ac:chgData name="Gilbert, Neil" userId="37be9f5c-8f28-415b-96d6-624acf93bb3f" providerId="ADAL" clId="{18ED56B6-1921-416C-9A28-3F6F3C8390B5}" dt="2026-09-17T16:19:22.440" v="114" actId="164"/>
           <ac:picMkLst>
             <pc:docMk/>
             <pc:sldMk cId="470603763" sldId="256"/>
@@ -295,28 +351,36 @@
             <ac:picMk id="10" creationId="{1A3D6F70-6D77-1AE7-42F9-DA3BE6DA71F6}"/>
           </ac:picMkLst>
         </pc:picChg>
-        <pc:picChg chg="del mod">
-          <ac:chgData name="Gilbert, Neil" userId="37be9f5c-8f28-415b-96d6-624acf93bb3f" providerId="ADAL" clId="{18ED56B6-1921-416C-9A28-3F6F3C8390B5}" dt="2026-09-03T16:48:39.327" v="50" actId="478"/>
+        <pc:picChg chg="mod">
+          <ac:chgData name="Gilbert, Neil" userId="37be9f5c-8f28-415b-96d6-624acf93bb3f" providerId="ADAL" clId="{18ED56B6-1921-416C-9A28-3F6F3C8390B5}" dt="2026-09-17T16:19:37.947" v="116"/>
           <ac:picMkLst>
             <pc:docMk/>
             <pc:sldMk cId="470603763" sldId="256"/>
-            <ac:picMk id="11" creationId="{E25FA32C-2262-3484-686E-583ADA0D3F9A}"/>
+            <ac:picMk id="11" creationId="{F04D2091-A806-2637-0954-106CFA39FEB5}"/>
           </ac:picMkLst>
         </pc:picChg>
         <pc:picChg chg="mod">
-          <ac:chgData name="Gilbert, Neil" userId="37be9f5c-8f28-415b-96d6-624acf93bb3f" providerId="ADAL" clId="{18ED56B6-1921-416C-9A28-3F6F3C8390B5}" dt="2026-09-03T16:43:14.878" v="4" actId="1038"/>
+          <ac:chgData name="Gilbert, Neil" userId="37be9f5c-8f28-415b-96d6-624acf93bb3f" providerId="ADAL" clId="{18ED56B6-1921-416C-9A28-3F6F3C8390B5}" dt="2026-09-17T16:19:37.947" v="116"/>
           <ac:picMkLst>
             <pc:docMk/>
             <pc:sldMk cId="470603763" sldId="256"/>
-            <ac:picMk id="15" creationId="{E25FA32C-2262-3484-686E-583ADA0D3F9A}"/>
+            <ac:picMk id="16" creationId="{1A3D6F70-6D77-1AE7-42F9-DA3BE6DA71F6}"/>
           </ac:picMkLst>
         </pc:picChg>
-        <pc:picChg chg="add del mod ord">
-          <ac:chgData name="Gilbert, Neil" userId="37be9f5c-8f28-415b-96d6-624acf93bb3f" providerId="ADAL" clId="{18ED56B6-1921-416C-9A28-3F6F3C8390B5}" dt="2026-09-03T17:10:06.373" v="88" actId="478"/>
+        <pc:picChg chg="mod">
+          <ac:chgData name="Gilbert, Neil" userId="37be9f5c-8f28-415b-96d6-624acf93bb3f" providerId="ADAL" clId="{18ED56B6-1921-416C-9A28-3F6F3C8390B5}" dt="2026-09-17T16:20:53.112" v="125"/>
           <ac:picMkLst>
             <pc:docMk/>
             <pc:sldMk cId="470603763" sldId="256"/>
-            <ac:picMk id="24" creationId="{3D3A23C8-FA56-3CBA-1434-06C2752546E8}"/>
+            <ac:picMk id="27" creationId="{F04D2091-A806-2637-0954-106CFA39FEB5}"/>
+          </ac:picMkLst>
+        </pc:picChg>
+        <pc:picChg chg="mod">
+          <ac:chgData name="Gilbert, Neil" userId="37be9f5c-8f28-415b-96d6-624acf93bb3f" providerId="ADAL" clId="{18ED56B6-1921-416C-9A28-3F6F3C8390B5}" dt="2026-09-17T16:20:53.112" v="125"/>
+          <ac:picMkLst>
+            <pc:docMk/>
+            <pc:sldMk cId="470603763" sldId="256"/>
+            <ac:picMk id="31" creationId="{1A3D6F70-6D77-1AE7-42F9-DA3BE6DA71F6}"/>
           </ac:picMkLst>
         </pc:picChg>
       </pc:sldChg>
@@ -354,15 +418,15 @@
         </p:nvSpPr>
         <p:spPr>
           <a:xfrm>
-            <a:off x="776089" y="448945"/>
-            <a:ext cx="4656535" cy="955040"/>
+            <a:off x="784027" y="464014"/>
+            <a:ext cx="4704160" cy="987096"/>
           </a:xfrm>
         </p:spPr>
         <p:txBody>
           <a:bodyPr anchor="b"/>
           <a:lstStyle>
             <a:lvl1pPr algn="ctr">
-              <a:defRPr sz="2400"/>
+              <a:defRPr sz="2480"/>
             </a:lvl1pPr>
           </a:lstStyle>
           <a:p>
@@ -386,8 +450,8 @@
         </p:nvSpPr>
         <p:spPr>
           <a:xfrm>
-            <a:off x="776089" y="1440815"/>
-            <a:ext cx="4656535" cy="662305"/>
+            <a:off x="784027" y="1489176"/>
+            <a:ext cx="4704160" cy="684535"/>
           </a:xfrm>
         </p:spPr>
         <p:txBody>
@@ -395,39 +459,39 @@
           <a:lstStyle>
             <a:lvl1pPr marL="0" indent="0" algn="ctr">
               <a:buNone/>
-              <a:defRPr sz="960"/>
+              <a:defRPr sz="992"/>
             </a:lvl1pPr>
-            <a:lvl2pPr marL="182880" indent="0" algn="ctr">
-              <a:buNone/>
-              <a:defRPr sz="800"/>
+            <a:lvl2pPr marL="189006" indent="0" algn="ctr">
+              <a:buNone/>
+              <a:defRPr sz="827"/>
             </a:lvl2pPr>
-            <a:lvl3pPr marL="365760" indent="0" algn="ctr">
-              <a:buNone/>
-              <a:defRPr sz="720"/>
+            <a:lvl3pPr marL="378013" indent="0" algn="ctr">
+              <a:buNone/>
+              <a:defRPr sz="744"/>
             </a:lvl3pPr>
-            <a:lvl4pPr marL="548640" indent="0" algn="ctr">
-              <a:buNone/>
-              <a:defRPr sz="640"/>
+            <a:lvl4pPr marL="567019" indent="0" algn="ctr">
+              <a:buNone/>
+              <a:defRPr sz="661"/>
             </a:lvl4pPr>
-            <a:lvl5pPr marL="731520" indent="0" algn="ctr">
-              <a:buNone/>
-              <a:defRPr sz="640"/>
+            <a:lvl5pPr marL="756026" indent="0" algn="ctr">
+              <a:buNone/>
+              <a:defRPr sz="661"/>
             </a:lvl5pPr>
-            <a:lvl6pPr marL="914400" indent="0" algn="ctr">
-              <a:buNone/>
-              <a:defRPr sz="640"/>
+            <a:lvl6pPr marL="945032" indent="0" algn="ctr">
+              <a:buNone/>
+              <a:defRPr sz="661"/>
             </a:lvl6pPr>
-            <a:lvl7pPr marL="1097280" indent="0" algn="ctr">
-              <a:buNone/>
-              <a:defRPr sz="640"/>
+            <a:lvl7pPr marL="1134039" indent="0" algn="ctr">
+              <a:buNone/>
+              <a:defRPr sz="661"/>
             </a:lvl7pPr>
-            <a:lvl8pPr marL="1280160" indent="0" algn="ctr">
-              <a:buNone/>
-              <a:defRPr sz="640"/>
+            <a:lvl8pPr marL="1323045" indent="0" algn="ctr">
+              <a:buNone/>
+              <a:defRPr sz="661"/>
             </a:lvl8pPr>
-            <a:lvl9pPr marL="1463040" indent="0" algn="ctr">
-              <a:buNone/>
-              <a:defRPr sz="640"/>
+            <a:lvl9pPr marL="1512052" indent="0" algn="ctr">
+              <a:buNone/>
+              <a:defRPr sz="661"/>
             </a:lvl9pPr>
           </a:lstStyle>
           <a:p>
@@ -456,7 +520,7 @@
           <a:p>
             <a:fld id="{8903F1AD-52AB-42AD-9792-3F248794A2B0}" type="datetimeFigureOut">
               <a:rPr lang="en-US" smtClean="0"/>
-              <a:t>9/3/2026</a:t>
+              <a:t>9/17/2026</a:t>
             </a:fld>
             <a:endParaRPr lang="en-US"/>
           </a:p>
@@ -507,7 +571,7 @@
     </p:spTree>
     <p:extLst>
       <p:ext uri="{BB962C8B-B14F-4D97-AF65-F5344CB8AC3E}">
-        <p14:creationId xmlns:p14="http://schemas.microsoft.com/office/powerpoint/2010/main" val="3446946278"/>
+        <p14:creationId xmlns:p14="http://schemas.microsoft.com/office/powerpoint/2010/main" val="859543233"/>
       </p:ext>
     </p:extLst>
   </p:cSld>
@@ -626,7 +690,7 @@
           <a:p>
             <a:fld id="{8903F1AD-52AB-42AD-9792-3F248794A2B0}" type="datetimeFigureOut">
               <a:rPr lang="en-US" smtClean="0"/>
-              <a:t>9/3/2026</a:t>
+              <a:t>9/17/2026</a:t>
             </a:fld>
             <a:endParaRPr lang="en-US"/>
           </a:p>
@@ -677,7 +741,7 @@
     </p:spTree>
     <p:extLst>
       <p:ext uri="{BB962C8B-B14F-4D97-AF65-F5344CB8AC3E}">
-        <p14:creationId xmlns:p14="http://schemas.microsoft.com/office/powerpoint/2010/main" val="1236207200"/>
+        <p14:creationId xmlns:p14="http://schemas.microsoft.com/office/powerpoint/2010/main" val="1768563659"/>
       </p:ext>
     </p:extLst>
   </p:cSld>
@@ -716,8 +780,8 @@
         </p:nvSpPr>
         <p:spPr>
           <a:xfrm>
-            <a:off x="4443110" y="146050"/>
-            <a:ext cx="1338754" cy="2324735"/>
+            <a:off x="4488552" y="150952"/>
+            <a:ext cx="1352446" cy="2402765"/>
           </a:xfrm>
         </p:spPr>
         <p:txBody>
@@ -744,8 +808,8 @@
         </p:nvSpPr>
         <p:spPr>
           <a:xfrm>
-            <a:off x="426849" y="146050"/>
-            <a:ext cx="3938652" cy="2324735"/>
+            <a:off x="431215" y="150952"/>
+            <a:ext cx="3978935" cy="2402765"/>
           </a:xfrm>
         </p:spPr>
         <p:txBody>
@@ -806,7 +870,7 @@
           <a:p>
             <a:fld id="{8903F1AD-52AB-42AD-9792-3F248794A2B0}" type="datetimeFigureOut">
               <a:rPr lang="en-US" smtClean="0"/>
-              <a:t>9/3/2026</a:t>
+              <a:t>9/17/2026</a:t>
             </a:fld>
             <a:endParaRPr lang="en-US"/>
           </a:p>
@@ -857,7 +921,7 @@
     </p:spTree>
     <p:extLst>
       <p:ext uri="{BB962C8B-B14F-4D97-AF65-F5344CB8AC3E}">
-        <p14:creationId xmlns:p14="http://schemas.microsoft.com/office/powerpoint/2010/main" val="3541118124"/>
+        <p14:creationId xmlns:p14="http://schemas.microsoft.com/office/powerpoint/2010/main" val="3557861797"/>
       </p:ext>
     </p:extLst>
   </p:cSld>
@@ -976,7 +1040,7 @@
           <a:p>
             <a:fld id="{8903F1AD-52AB-42AD-9792-3F248794A2B0}" type="datetimeFigureOut">
               <a:rPr lang="en-US" smtClean="0"/>
-              <a:t>9/3/2026</a:t>
+              <a:t>9/17/2026</a:t>
             </a:fld>
             <a:endParaRPr lang="en-US"/>
           </a:p>
@@ -1027,7 +1091,7 @@
     </p:spTree>
     <p:extLst>
       <p:ext uri="{BB962C8B-B14F-4D97-AF65-F5344CB8AC3E}">
-        <p14:creationId xmlns:p14="http://schemas.microsoft.com/office/powerpoint/2010/main" val="2450752411"/>
+        <p14:creationId xmlns:p14="http://schemas.microsoft.com/office/powerpoint/2010/main" val="2896415278"/>
       </p:ext>
     </p:extLst>
   </p:cSld>
@@ -1066,15 +1130,15 @@
         </p:nvSpPr>
         <p:spPr>
           <a:xfrm>
-            <a:off x="423615" y="683895"/>
-            <a:ext cx="5355015" cy="1141095"/>
+            <a:off x="427948" y="706850"/>
+            <a:ext cx="5409784" cy="1179395"/>
           </a:xfrm>
         </p:spPr>
         <p:txBody>
           <a:bodyPr anchor="b"/>
           <a:lstStyle>
             <a:lvl1pPr>
-              <a:defRPr sz="2400"/>
+              <a:defRPr sz="2480"/>
             </a:lvl1pPr>
           </a:lstStyle>
           <a:p>
@@ -1098,8 +1162,8 @@
         </p:nvSpPr>
         <p:spPr>
           <a:xfrm>
-            <a:off x="423615" y="1835785"/>
-            <a:ext cx="5355015" cy="600075"/>
+            <a:off x="427948" y="1897403"/>
+            <a:ext cx="5409784" cy="620216"/>
           </a:xfrm>
         </p:spPr>
         <p:txBody>
@@ -1107,7 +1171,7 @@
           <a:lstStyle>
             <a:lvl1pPr marL="0" indent="0">
               <a:buNone/>
-              <a:defRPr sz="960">
+              <a:defRPr sz="992">
                 <a:solidFill>
                   <a:schemeClr val="tx1">
                     <a:tint val="82000"/>
@@ -1115,9 +1179,9 @@
                 </a:solidFill>
               </a:defRPr>
             </a:lvl1pPr>
-            <a:lvl2pPr marL="182880" indent="0">
-              <a:buNone/>
-              <a:defRPr sz="800">
+            <a:lvl2pPr marL="189006" indent="0">
+              <a:buNone/>
+              <a:defRPr sz="827">
                 <a:solidFill>
                   <a:schemeClr val="tx1">
                     <a:tint val="82000"/>
@@ -1125,9 +1189,9 @@
                 </a:solidFill>
               </a:defRPr>
             </a:lvl2pPr>
-            <a:lvl3pPr marL="365760" indent="0">
-              <a:buNone/>
-              <a:defRPr sz="720">
+            <a:lvl3pPr marL="378013" indent="0">
+              <a:buNone/>
+              <a:defRPr sz="744">
                 <a:solidFill>
                   <a:schemeClr val="tx1">
                     <a:tint val="82000"/>
@@ -1135,9 +1199,9 @@
                 </a:solidFill>
               </a:defRPr>
             </a:lvl3pPr>
-            <a:lvl4pPr marL="548640" indent="0">
-              <a:buNone/>
-              <a:defRPr sz="640">
+            <a:lvl4pPr marL="567019" indent="0">
+              <a:buNone/>
+              <a:defRPr sz="661">
                 <a:solidFill>
                   <a:schemeClr val="tx1">
                     <a:tint val="82000"/>
@@ -1145,9 +1209,9 @@
                 </a:solidFill>
               </a:defRPr>
             </a:lvl4pPr>
-            <a:lvl5pPr marL="731520" indent="0">
-              <a:buNone/>
-              <a:defRPr sz="640">
+            <a:lvl5pPr marL="756026" indent="0">
+              <a:buNone/>
+              <a:defRPr sz="661">
                 <a:solidFill>
                   <a:schemeClr val="tx1">
                     <a:tint val="82000"/>
@@ -1155,9 +1219,9 @@
                 </a:solidFill>
               </a:defRPr>
             </a:lvl5pPr>
-            <a:lvl6pPr marL="914400" indent="0">
-              <a:buNone/>
-              <a:defRPr sz="640">
+            <a:lvl6pPr marL="945032" indent="0">
+              <a:buNone/>
+              <a:defRPr sz="661">
                 <a:solidFill>
                   <a:schemeClr val="tx1">
                     <a:tint val="82000"/>
@@ -1165,9 +1229,9 @@
                 </a:solidFill>
               </a:defRPr>
             </a:lvl6pPr>
-            <a:lvl7pPr marL="1097280" indent="0">
-              <a:buNone/>
-              <a:defRPr sz="640">
+            <a:lvl7pPr marL="1134039" indent="0">
+              <a:buNone/>
+              <a:defRPr sz="661">
                 <a:solidFill>
                   <a:schemeClr val="tx1">
                     <a:tint val="82000"/>
@@ -1175,9 +1239,9 @@
                 </a:solidFill>
               </a:defRPr>
             </a:lvl7pPr>
-            <a:lvl8pPr marL="1280160" indent="0">
-              <a:buNone/>
-              <a:defRPr sz="640">
+            <a:lvl8pPr marL="1323045" indent="0">
+              <a:buNone/>
+              <a:defRPr sz="661">
                 <a:solidFill>
                   <a:schemeClr val="tx1">
                     <a:tint val="82000"/>
@@ -1185,9 +1249,9 @@
                 </a:solidFill>
               </a:defRPr>
             </a:lvl8pPr>
-            <a:lvl9pPr marL="1463040" indent="0">
-              <a:buNone/>
-              <a:defRPr sz="640">
+            <a:lvl9pPr marL="1512052" indent="0">
+              <a:buNone/>
+              <a:defRPr sz="661">
                 <a:solidFill>
                   <a:schemeClr val="tx1">
                     <a:tint val="82000"/>
@@ -1222,7 +1286,7 @@
           <a:p>
             <a:fld id="{8903F1AD-52AB-42AD-9792-3F248794A2B0}" type="datetimeFigureOut">
               <a:rPr lang="en-US" smtClean="0"/>
-              <a:t>9/3/2026</a:t>
+              <a:t>9/17/2026</a:t>
             </a:fld>
             <a:endParaRPr lang="en-US"/>
           </a:p>
@@ -1273,7 +1337,7 @@
     </p:spTree>
     <p:extLst>
       <p:ext uri="{BB962C8B-B14F-4D97-AF65-F5344CB8AC3E}">
-        <p14:creationId xmlns:p14="http://schemas.microsoft.com/office/powerpoint/2010/main" val="3004574564"/>
+        <p14:creationId xmlns:p14="http://schemas.microsoft.com/office/powerpoint/2010/main" val="3004990859"/>
       </p:ext>
     </p:extLst>
   </p:cSld>
@@ -1335,8 +1399,8 @@
         </p:nvSpPr>
         <p:spPr>
           <a:xfrm>
-            <a:off x="426849" y="730250"/>
-            <a:ext cx="2638703" cy="1740535"/>
+            <a:off x="431214" y="754761"/>
+            <a:ext cx="2665691" cy="1798956"/>
           </a:xfrm>
         </p:spPr>
         <p:txBody>
@@ -1392,8 +1456,8 @@
         </p:nvSpPr>
         <p:spPr>
           <a:xfrm>
-            <a:off x="3143161" y="730250"/>
-            <a:ext cx="2638703" cy="1740535"/>
+            <a:off x="3175308" y="754761"/>
+            <a:ext cx="2665691" cy="1798956"/>
           </a:xfrm>
         </p:spPr>
         <p:txBody>
@@ -1454,7 +1518,7 @@
           <a:p>
             <a:fld id="{8903F1AD-52AB-42AD-9792-3F248794A2B0}" type="datetimeFigureOut">
               <a:rPr lang="en-US" smtClean="0"/>
-              <a:t>9/3/2026</a:t>
+              <a:t>9/17/2026</a:t>
             </a:fld>
             <a:endParaRPr lang="en-US"/>
           </a:p>
@@ -1505,7 +1569,7 @@
     </p:spTree>
     <p:extLst>
       <p:ext uri="{BB962C8B-B14F-4D97-AF65-F5344CB8AC3E}">
-        <p14:creationId xmlns:p14="http://schemas.microsoft.com/office/powerpoint/2010/main" val="96117573"/>
+        <p14:creationId xmlns:p14="http://schemas.microsoft.com/office/powerpoint/2010/main" val="3761775684"/>
       </p:ext>
     </p:extLst>
   </p:cSld>
@@ -1544,8 +1608,8 @@
         </p:nvSpPr>
         <p:spPr>
           <a:xfrm>
-            <a:off x="427658" y="146050"/>
-            <a:ext cx="5355015" cy="530225"/>
+            <a:off x="432031" y="150952"/>
+            <a:ext cx="5409784" cy="548022"/>
           </a:xfrm>
         </p:spPr>
         <p:txBody>
@@ -1572,8 +1636,8 @@
         </p:nvSpPr>
         <p:spPr>
           <a:xfrm>
-            <a:off x="427658" y="672465"/>
-            <a:ext cx="2626576" cy="329565"/>
+            <a:off x="432032" y="695036"/>
+            <a:ext cx="2653440" cy="340627"/>
           </a:xfrm>
         </p:spPr>
         <p:txBody>
@@ -1581,39 +1645,39 @@
           <a:lstStyle>
             <a:lvl1pPr marL="0" indent="0">
               <a:buNone/>
-              <a:defRPr sz="960" b="1"/>
+              <a:defRPr sz="992" b="1"/>
             </a:lvl1pPr>
-            <a:lvl2pPr marL="182880" indent="0">
-              <a:buNone/>
-              <a:defRPr sz="800" b="1"/>
+            <a:lvl2pPr marL="189006" indent="0">
+              <a:buNone/>
+              <a:defRPr sz="827" b="1"/>
             </a:lvl2pPr>
-            <a:lvl3pPr marL="365760" indent="0">
-              <a:buNone/>
-              <a:defRPr sz="720" b="1"/>
+            <a:lvl3pPr marL="378013" indent="0">
+              <a:buNone/>
+              <a:defRPr sz="744" b="1"/>
             </a:lvl3pPr>
-            <a:lvl4pPr marL="548640" indent="0">
-              <a:buNone/>
-              <a:defRPr sz="640" b="1"/>
+            <a:lvl4pPr marL="567019" indent="0">
+              <a:buNone/>
+              <a:defRPr sz="661" b="1"/>
             </a:lvl4pPr>
-            <a:lvl5pPr marL="731520" indent="0">
-              <a:buNone/>
-              <a:defRPr sz="640" b="1"/>
+            <a:lvl5pPr marL="756026" indent="0">
+              <a:buNone/>
+              <a:defRPr sz="661" b="1"/>
             </a:lvl5pPr>
-            <a:lvl6pPr marL="914400" indent="0">
-              <a:buNone/>
-              <a:defRPr sz="640" b="1"/>
+            <a:lvl6pPr marL="945032" indent="0">
+              <a:buNone/>
+              <a:defRPr sz="661" b="1"/>
             </a:lvl6pPr>
-            <a:lvl7pPr marL="1097280" indent="0">
-              <a:buNone/>
-              <a:defRPr sz="640" b="1"/>
+            <a:lvl7pPr marL="1134039" indent="0">
+              <a:buNone/>
+              <a:defRPr sz="661" b="1"/>
             </a:lvl7pPr>
-            <a:lvl8pPr marL="1280160" indent="0">
-              <a:buNone/>
-              <a:defRPr sz="640" b="1"/>
+            <a:lvl8pPr marL="1323045" indent="0">
+              <a:buNone/>
+              <a:defRPr sz="661" b="1"/>
             </a:lvl8pPr>
-            <a:lvl9pPr marL="1463040" indent="0">
-              <a:buNone/>
-              <a:defRPr sz="640" b="1"/>
+            <a:lvl9pPr marL="1512052" indent="0">
+              <a:buNone/>
+              <a:defRPr sz="661" b="1"/>
             </a:lvl9pPr>
           </a:lstStyle>
           <a:p>
@@ -1637,8 +1701,8 @@
         </p:nvSpPr>
         <p:spPr>
           <a:xfrm>
-            <a:off x="427658" y="1002030"/>
-            <a:ext cx="2626576" cy="1473835"/>
+            <a:off x="432032" y="1035663"/>
+            <a:ext cx="2653440" cy="1523304"/>
           </a:xfrm>
         </p:spPr>
         <p:txBody>
@@ -1694,8 +1758,8 @@
         </p:nvSpPr>
         <p:spPr>
           <a:xfrm>
-            <a:off x="3143161" y="672465"/>
-            <a:ext cx="2639512" cy="329565"/>
+            <a:off x="3175308" y="695036"/>
+            <a:ext cx="2666507" cy="340627"/>
           </a:xfrm>
         </p:spPr>
         <p:txBody>
@@ -1703,39 +1767,39 @@
           <a:lstStyle>
             <a:lvl1pPr marL="0" indent="0">
               <a:buNone/>
-              <a:defRPr sz="960" b="1"/>
+              <a:defRPr sz="992" b="1"/>
             </a:lvl1pPr>
-            <a:lvl2pPr marL="182880" indent="0">
-              <a:buNone/>
-              <a:defRPr sz="800" b="1"/>
+            <a:lvl2pPr marL="189006" indent="0">
+              <a:buNone/>
+              <a:defRPr sz="827" b="1"/>
             </a:lvl2pPr>
-            <a:lvl3pPr marL="365760" indent="0">
-              <a:buNone/>
-              <a:defRPr sz="720" b="1"/>
+            <a:lvl3pPr marL="378013" indent="0">
+              <a:buNone/>
+              <a:defRPr sz="744" b="1"/>
             </a:lvl3pPr>
-            <a:lvl4pPr marL="548640" indent="0">
-              <a:buNone/>
-              <a:defRPr sz="640" b="1"/>
+            <a:lvl4pPr marL="567019" indent="0">
+              <a:buNone/>
+              <a:defRPr sz="661" b="1"/>
             </a:lvl4pPr>
-            <a:lvl5pPr marL="731520" indent="0">
-              <a:buNone/>
-              <a:defRPr sz="640" b="1"/>
+            <a:lvl5pPr marL="756026" indent="0">
+              <a:buNone/>
+              <a:defRPr sz="661" b="1"/>
             </a:lvl5pPr>
-            <a:lvl6pPr marL="914400" indent="0">
-              <a:buNone/>
-              <a:defRPr sz="640" b="1"/>
+            <a:lvl6pPr marL="945032" indent="0">
+              <a:buNone/>
+              <a:defRPr sz="661" b="1"/>
             </a:lvl6pPr>
-            <a:lvl7pPr marL="1097280" indent="0">
-              <a:buNone/>
-              <a:defRPr sz="640" b="1"/>
+            <a:lvl7pPr marL="1134039" indent="0">
+              <a:buNone/>
+              <a:defRPr sz="661" b="1"/>
             </a:lvl7pPr>
-            <a:lvl8pPr marL="1280160" indent="0">
-              <a:buNone/>
-              <a:defRPr sz="640" b="1"/>
+            <a:lvl8pPr marL="1323045" indent="0">
+              <a:buNone/>
+              <a:defRPr sz="661" b="1"/>
             </a:lvl8pPr>
-            <a:lvl9pPr marL="1463040" indent="0">
-              <a:buNone/>
-              <a:defRPr sz="640" b="1"/>
+            <a:lvl9pPr marL="1512052" indent="0">
+              <a:buNone/>
+              <a:defRPr sz="661" b="1"/>
             </a:lvl9pPr>
           </a:lstStyle>
           <a:p>
@@ -1759,8 +1823,8 @@
         </p:nvSpPr>
         <p:spPr>
           <a:xfrm>
-            <a:off x="3143161" y="1002030"/>
-            <a:ext cx="2639512" cy="1473835"/>
+            <a:off x="3175308" y="1035663"/>
+            <a:ext cx="2666507" cy="1523304"/>
           </a:xfrm>
         </p:spPr>
         <p:txBody>
@@ -1821,7 +1885,7 @@
           <a:p>
             <a:fld id="{8903F1AD-52AB-42AD-9792-3F248794A2B0}" type="datetimeFigureOut">
               <a:rPr lang="en-US" smtClean="0"/>
-              <a:t>9/3/2026</a:t>
+              <a:t>9/17/2026</a:t>
             </a:fld>
             <a:endParaRPr lang="en-US"/>
           </a:p>
@@ -1872,7 +1936,7 @@
     </p:spTree>
     <p:extLst>
       <p:ext uri="{BB962C8B-B14F-4D97-AF65-F5344CB8AC3E}">
-        <p14:creationId xmlns:p14="http://schemas.microsoft.com/office/powerpoint/2010/main" val="2706158982"/>
+        <p14:creationId xmlns:p14="http://schemas.microsoft.com/office/powerpoint/2010/main" val="3127239349"/>
       </p:ext>
     </p:extLst>
   </p:cSld>
@@ -1939,7 +2003,7 @@
           <a:p>
             <a:fld id="{8903F1AD-52AB-42AD-9792-3F248794A2B0}" type="datetimeFigureOut">
               <a:rPr lang="en-US" smtClean="0"/>
-              <a:t>9/3/2026</a:t>
+              <a:t>9/17/2026</a:t>
             </a:fld>
             <a:endParaRPr lang="en-US"/>
           </a:p>
@@ -1990,7 +2054,7 @@
     </p:spTree>
     <p:extLst>
       <p:ext uri="{BB962C8B-B14F-4D97-AF65-F5344CB8AC3E}">
-        <p14:creationId xmlns:p14="http://schemas.microsoft.com/office/powerpoint/2010/main" val="2620310474"/>
+        <p14:creationId xmlns:p14="http://schemas.microsoft.com/office/powerpoint/2010/main" val="971206373"/>
       </p:ext>
     </p:extLst>
   </p:cSld>
@@ -2034,7 +2098,7 @@
           <a:p>
             <a:fld id="{8903F1AD-52AB-42AD-9792-3F248794A2B0}" type="datetimeFigureOut">
               <a:rPr lang="en-US" smtClean="0"/>
-              <a:t>9/3/2026</a:t>
+              <a:t>9/17/2026</a:t>
             </a:fld>
             <a:endParaRPr lang="en-US"/>
           </a:p>
@@ -2085,7 +2149,7 @@
     </p:spTree>
     <p:extLst>
       <p:ext uri="{BB962C8B-B14F-4D97-AF65-F5344CB8AC3E}">
-        <p14:creationId xmlns:p14="http://schemas.microsoft.com/office/powerpoint/2010/main" val="1674466415"/>
+        <p14:creationId xmlns:p14="http://schemas.microsoft.com/office/powerpoint/2010/main" val="1098973224"/>
       </p:ext>
     </p:extLst>
   </p:cSld>
@@ -2124,15 +2188,15 @@
         </p:nvSpPr>
         <p:spPr>
           <a:xfrm>
-            <a:off x="427658" y="182880"/>
-            <a:ext cx="2002471" cy="640080"/>
+            <a:off x="432032" y="189018"/>
+            <a:ext cx="2022952" cy="661564"/>
           </a:xfrm>
         </p:spPr>
         <p:txBody>
           <a:bodyPr anchor="b"/>
           <a:lstStyle>
             <a:lvl1pPr>
-              <a:defRPr sz="1280"/>
+              <a:defRPr sz="1323"/>
             </a:lvl1pPr>
           </a:lstStyle>
           <a:p>
@@ -2156,39 +2220,39 @@
         </p:nvSpPr>
         <p:spPr>
           <a:xfrm>
-            <a:off x="2639512" y="394970"/>
-            <a:ext cx="3143161" cy="1949450"/>
+            <a:off x="2666507" y="408227"/>
+            <a:ext cx="3175308" cy="2014883"/>
           </a:xfrm>
         </p:spPr>
         <p:txBody>
           <a:bodyPr/>
           <a:lstStyle>
             <a:lvl1pPr>
-              <a:defRPr sz="1280"/>
+              <a:defRPr sz="1323"/>
             </a:lvl1pPr>
             <a:lvl2pPr>
-              <a:defRPr sz="1120"/>
+              <a:defRPr sz="1158"/>
             </a:lvl2pPr>
             <a:lvl3pPr>
-              <a:defRPr sz="960"/>
+              <a:defRPr sz="992"/>
             </a:lvl3pPr>
             <a:lvl4pPr>
-              <a:defRPr sz="800"/>
+              <a:defRPr sz="827"/>
             </a:lvl4pPr>
             <a:lvl5pPr>
-              <a:defRPr sz="800"/>
+              <a:defRPr sz="827"/>
             </a:lvl5pPr>
             <a:lvl6pPr>
-              <a:defRPr sz="800"/>
+              <a:defRPr sz="827"/>
             </a:lvl6pPr>
             <a:lvl7pPr>
-              <a:defRPr sz="800"/>
+              <a:defRPr sz="827"/>
             </a:lvl7pPr>
             <a:lvl8pPr>
-              <a:defRPr sz="800"/>
+              <a:defRPr sz="827"/>
             </a:lvl8pPr>
             <a:lvl9pPr>
-              <a:defRPr sz="800"/>
+              <a:defRPr sz="827"/>
             </a:lvl9pPr>
           </a:lstStyle>
           <a:p>
@@ -2241,8 +2305,8 @@
         </p:nvSpPr>
         <p:spPr>
           <a:xfrm>
-            <a:off x="427658" y="822960"/>
-            <a:ext cx="2002471" cy="1524635"/>
+            <a:off x="432032" y="850583"/>
+            <a:ext cx="2022952" cy="1575809"/>
           </a:xfrm>
         </p:spPr>
         <p:txBody>
@@ -2250,39 +2314,39 @@
           <a:lstStyle>
             <a:lvl1pPr marL="0" indent="0">
               <a:buNone/>
-              <a:defRPr sz="640"/>
+              <a:defRPr sz="661"/>
             </a:lvl1pPr>
-            <a:lvl2pPr marL="182880" indent="0">
-              <a:buNone/>
-              <a:defRPr sz="560"/>
+            <a:lvl2pPr marL="189006" indent="0">
+              <a:buNone/>
+              <a:defRPr sz="579"/>
             </a:lvl2pPr>
-            <a:lvl3pPr marL="365760" indent="0">
-              <a:buNone/>
-              <a:defRPr sz="480"/>
+            <a:lvl3pPr marL="378013" indent="0">
+              <a:buNone/>
+              <a:defRPr sz="496"/>
             </a:lvl3pPr>
-            <a:lvl4pPr marL="548640" indent="0">
-              <a:buNone/>
-              <a:defRPr sz="400"/>
+            <a:lvl4pPr marL="567019" indent="0">
+              <a:buNone/>
+              <a:defRPr sz="413"/>
             </a:lvl4pPr>
-            <a:lvl5pPr marL="731520" indent="0">
-              <a:buNone/>
-              <a:defRPr sz="400"/>
+            <a:lvl5pPr marL="756026" indent="0">
+              <a:buNone/>
+              <a:defRPr sz="413"/>
             </a:lvl5pPr>
-            <a:lvl6pPr marL="914400" indent="0">
-              <a:buNone/>
-              <a:defRPr sz="400"/>
+            <a:lvl6pPr marL="945032" indent="0">
+              <a:buNone/>
+              <a:defRPr sz="413"/>
             </a:lvl6pPr>
-            <a:lvl7pPr marL="1097280" indent="0">
-              <a:buNone/>
-              <a:defRPr sz="400"/>
+            <a:lvl7pPr marL="1134039" indent="0">
+              <a:buNone/>
+              <a:defRPr sz="413"/>
             </a:lvl7pPr>
-            <a:lvl8pPr marL="1280160" indent="0">
-              <a:buNone/>
-              <a:defRPr sz="400"/>
+            <a:lvl8pPr marL="1323045" indent="0">
+              <a:buNone/>
+              <a:defRPr sz="413"/>
             </a:lvl8pPr>
-            <a:lvl9pPr marL="1463040" indent="0">
-              <a:buNone/>
-              <a:defRPr sz="400"/>
+            <a:lvl9pPr marL="1512052" indent="0">
+              <a:buNone/>
+              <a:defRPr sz="413"/>
             </a:lvl9pPr>
           </a:lstStyle>
           <a:p>
@@ -2311,7 +2375,7 @@
           <a:p>
             <a:fld id="{8903F1AD-52AB-42AD-9792-3F248794A2B0}" type="datetimeFigureOut">
               <a:rPr lang="en-US" smtClean="0"/>
-              <a:t>9/3/2026</a:t>
+              <a:t>9/17/2026</a:t>
             </a:fld>
             <a:endParaRPr lang="en-US"/>
           </a:p>
@@ -2362,7 +2426,7 @@
     </p:spTree>
     <p:extLst>
       <p:ext uri="{BB962C8B-B14F-4D97-AF65-F5344CB8AC3E}">
-        <p14:creationId xmlns:p14="http://schemas.microsoft.com/office/powerpoint/2010/main" val="2660144977"/>
+        <p14:creationId xmlns:p14="http://schemas.microsoft.com/office/powerpoint/2010/main" val="2337366265"/>
       </p:ext>
     </p:extLst>
   </p:cSld>
@@ -2401,15 +2465,15 @@
         </p:nvSpPr>
         <p:spPr>
           <a:xfrm>
-            <a:off x="427658" y="182880"/>
-            <a:ext cx="2002471" cy="640080"/>
+            <a:off x="432032" y="189018"/>
+            <a:ext cx="2022952" cy="661564"/>
           </a:xfrm>
         </p:spPr>
         <p:txBody>
           <a:bodyPr anchor="b"/>
           <a:lstStyle>
             <a:lvl1pPr>
-              <a:defRPr sz="1280"/>
+              <a:defRPr sz="1323"/>
             </a:lvl1pPr>
           </a:lstStyle>
           <a:p>
@@ -2433,8 +2497,8 @@
         </p:nvSpPr>
         <p:spPr>
           <a:xfrm>
-            <a:off x="2639512" y="394970"/>
-            <a:ext cx="3143161" cy="1949450"/>
+            <a:off x="2666507" y="408227"/>
+            <a:ext cx="3175308" cy="2014883"/>
           </a:xfrm>
         </p:spPr>
         <p:txBody>
@@ -2442,39 +2506,39 @@
           <a:lstStyle>
             <a:lvl1pPr marL="0" indent="0">
               <a:buNone/>
-              <a:defRPr sz="1280"/>
+              <a:defRPr sz="1323"/>
             </a:lvl1pPr>
-            <a:lvl2pPr marL="182880" indent="0">
-              <a:buNone/>
-              <a:defRPr sz="1120"/>
+            <a:lvl2pPr marL="189006" indent="0">
+              <a:buNone/>
+              <a:defRPr sz="1158"/>
             </a:lvl2pPr>
-            <a:lvl3pPr marL="365760" indent="0">
-              <a:buNone/>
-              <a:defRPr sz="960"/>
+            <a:lvl3pPr marL="378013" indent="0">
+              <a:buNone/>
+              <a:defRPr sz="992"/>
             </a:lvl3pPr>
-            <a:lvl4pPr marL="548640" indent="0">
-              <a:buNone/>
-              <a:defRPr sz="800"/>
+            <a:lvl4pPr marL="567019" indent="0">
+              <a:buNone/>
+              <a:defRPr sz="827"/>
             </a:lvl4pPr>
-            <a:lvl5pPr marL="731520" indent="0">
-              <a:buNone/>
-              <a:defRPr sz="800"/>
+            <a:lvl5pPr marL="756026" indent="0">
+              <a:buNone/>
+              <a:defRPr sz="827"/>
             </a:lvl5pPr>
-            <a:lvl6pPr marL="914400" indent="0">
-              <a:buNone/>
-              <a:defRPr sz="800"/>
+            <a:lvl6pPr marL="945032" indent="0">
+              <a:buNone/>
+              <a:defRPr sz="827"/>
             </a:lvl6pPr>
-            <a:lvl7pPr marL="1097280" indent="0">
-              <a:buNone/>
-              <a:defRPr sz="800"/>
+            <a:lvl7pPr marL="1134039" indent="0">
+              <a:buNone/>
+              <a:defRPr sz="827"/>
             </a:lvl7pPr>
-            <a:lvl8pPr marL="1280160" indent="0">
-              <a:buNone/>
-              <a:defRPr sz="800"/>
+            <a:lvl8pPr marL="1323045" indent="0">
+              <a:buNone/>
+              <a:defRPr sz="827"/>
             </a:lvl8pPr>
-            <a:lvl9pPr marL="1463040" indent="0">
-              <a:buNone/>
-              <a:defRPr sz="800"/>
+            <a:lvl9pPr marL="1512052" indent="0">
+              <a:buNone/>
+              <a:defRPr sz="827"/>
             </a:lvl9pPr>
           </a:lstStyle>
           <a:p>
@@ -2498,8 +2562,8 @@
         </p:nvSpPr>
         <p:spPr>
           <a:xfrm>
-            <a:off x="427658" y="822960"/>
-            <a:ext cx="2002471" cy="1524635"/>
+            <a:off x="432032" y="850583"/>
+            <a:ext cx="2022952" cy="1575809"/>
           </a:xfrm>
         </p:spPr>
         <p:txBody>
@@ -2507,39 +2571,39 @@
           <a:lstStyle>
             <a:lvl1pPr marL="0" indent="0">
               <a:buNone/>
-              <a:defRPr sz="640"/>
+              <a:defRPr sz="661"/>
             </a:lvl1pPr>
-            <a:lvl2pPr marL="182880" indent="0">
-              <a:buNone/>
-              <a:defRPr sz="560"/>
+            <a:lvl2pPr marL="189006" indent="0">
+              <a:buNone/>
+              <a:defRPr sz="579"/>
             </a:lvl2pPr>
-            <a:lvl3pPr marL="365760" indent="0">
-              <a:buNone/>
-              <a:defRPr sz="480"/>
+            <a:lvl3pPr marL="378013" indent="0">
+              <a:buNone/>
+              <a:defRPr sz="496"/>
             </a:lvl3pPr>
-            <a:lvl4pPr marL="548640" indent="0">
-              <a:buNone/>
-              <a:defRPr sz="400"/>
+            <a:lvl4pPr marL="567019" indent="0">
+              <a:buNone/>
+              <a:defRPr sz="413"/>
             </a:lvl4pPr>
-            <a:lvl5pPr marL="731520" indent="0">
-              <a:buNone/>
-              <a:defRPr sz="400"/>
+            <a:lvl5pPr marL="756026" indent="0">
+              <a:buNone/>
+              <a:defRPr sz="413"/>
             </a:lvl5pPr>
-            <a:lvl6pPr marL="914400" indent="0">
-              <a:buNone/>
-              <a:defRPr sz="400"/>
+            <a:lvl6pPr marL="945032" indent="0">
+              <a:buNone/>
+              <a:defRPr sz="413"/>
             </a:lvl6pPr>
-            <a:lvl7pPr marL="1097280" indent="0">
-              <a:buNone/>
-              <a:defRPr sz="400"/>
+            <a:lvl7pPr marL="1134039" indent="0">
+              <a:buNone/>
+              <a:defRPr sz="413"/>
             </a:lvl7pPr>
-            <a:lvl8pPr marL="1280160" indent="0">
-              <a:buNone/>
-              <a:defRPr sz="400"/>
+            <a:lvl8pPr marL="1323045" indent="0">
+              <a:buNone/>
+              <a:defRPr sz="413"/>
             </a:lvl8pPr>
-            <a:lvl9pPr marL="1463040" indent="0">
-              <a:buNone/>
-              <a:defRPr sz="400"/>
+            <a:lvl9pPr marL="1512052" indent="0">
+              <a:buNone/>
+              <a:defRPr sz="413"/>
             </a:lvl9pPr>
           </a:lstStyle>
           <a:p>
@@ -2568,7 +2632,7 @@
           <a:p>
             <a:fld id="{8903F1AD-52AB-42AD-9792-3F248794A2B0}" type="datetimeFigureOut">
               <a:rPr lang="en-US" smtClean="0"/>
-              <a:t>9/3/2026</a:t>
+              <a:t>9/17/2026</a:t>
             </a:fld>
             <a:endParaRPr lang="en-US"/>
           </a:p>
@@ -2619,7 +2683,7 @@
     </p:spTree>
     <p:extLst>
       <p:ext uri="{BB962C8B-B14F-4D97-AF65-F5344CB8AC3E}">
-        <p14:creationId xmlns:p14="http://schemas.microsoft.com/office/powerpoint/2010/main" val="49231819"/>
+        <p14:creationId xmlns:p14="http://schemas.microsoft.com/office/powerpoint/2010/main" val="2701143923"/>
       </p:ext>
     </p:extLst>
   </p:cSld>
@@ -2663,8 +2727,8 @@
         </p:nvSpPr>
         <p:spPr>
           <a:xfrm>
-            <a:off x="426849" y="146050"/>
-            <a:ext cx="5355015" cy="530225"/>
+            <a:off x="431215" y="150952"/>
+            <a:ext cx="5409784" cy="548022"/>
           </a:xfrm>
           <a:prstGeom prst="rect">
             <a:avLst/>
@@ -2696,8 +2760,8 @@
         </p:nvSpPr>
         <p:spPr>
           <a:xfrm>
-            <a:off x="426849" y="730250"/>
-            <a:ext cx="5355015" cy="1740535"/>
+            <a:off x="431215" y="754761"/>
+            <a:ext cx="5409784" cy="1798956"/>
           </a:xfrm>
           <a:prstGeom prst="rect">
             <a:avLst/>
@@ -2758,8 +2822,8 @@
         </p:nvSpPr>
         <p:spPr>
           <a:xfrm>
-            <a:off x="426849" y="2542540"/>
-            <a:ext cx="1396960" cy="146050"/>
+            <a:off x="431215" y="2627880"/>
+            <a:ext cx="1411248" cy="150952"/>
           </a:xfrm>
           <a:prstGeom prst="rect">
             <a:avLst/>
@@ -2769,7 +2833,7 @@
           <a:bodyPr vert="horz" lIns="91440" tIns="45720" rIns="91440" bIns="45720" rtlCol="0" anchor="ctr"/>
           <a:lstStyle>
             <a:lvl1pPr algn="l">
-              <a:defRPr sz="480">
+              <a:defRPr sz="496">
                 <a:solidFill>
                   <a:schemeClr val="tx1">
                     <a:tint val="82000"/>
@@ -2781,7 +2845,7 @@
           <a:p>
             <a:fld id="{8903F1AD-52AB-42AD-9792-3F248794A2B0}" type="datetimeFigureOut">
               <a:rPr lang="en-US" smtClean="0"/>
-              <a:t>9/3/2026</a:t>
+              <a:t>9/17/2026</a:t>
             </a:fld>
             <a:endParaRPr lang="en-US"/>
           </a:p>
@@ -2799,8 +2863,8 @@
         </p:nvSpPr>
         <p:spPr>
           <a:xfrm>
-            <a:off x="2056636" y="2542540"/>
-            <a:ext cx="2095441" cy="146050"/>
+            <a:off x="2077671" y="2627880"/>
+            <a:ext cx="2116872" cy="150952"/>
           </a:xfrm>
           <a:prstGeom prst="rect">
             <a:avLst/>
@@ -2810,7 +2874,7 @@
           <a:bodyPr vert="horz" lIns="91440" tIns="45720" rIns="91440" bIns="45720" rtlCol="0" anchor="ctr"/>
           <a:lstStyle>
             <a:lvl1pPr algn="ctr">
-              <a:defRPr sz="480">
+              <a:defRPr sz="496">
                 <a:solidFill>
                   <a:schemeClr val="tx1">
                     <a:tint val="82000"/>
@@ -2836,8 +2900,8 @@
         </p:nvSpPr>
         <p:spPr>
           <a:xfrm>
-            <a:off x="4384904" y="2542540"/>
-            <a:ext cx="1396960" cy="146050"/>
+            <a:off x="4429750" y="2627880"/>
+            <a:ext cx="1411248" cy="150952"/>
           </a:xfrm>
           <a:prstGeom prst="rect">
             <a:avLst/>
@@ -2847,7 +2911,7 @@
           <a:bodyPr vert="horz" lIns="91440" tIns="45720" rIns="91440" bIns="45720" rtlCol="0" anchor="ctr"/>
           <a:lstStyle>
             <a:lvl1pPr algn="r">
-              <a:defRPr sz="480">
+              <a:defRPr sz="496">
                 <a:solidFill>
                   <a:schemeClr val="tx1">
                     <a:tint val="82000"/>
@@ -2868,27 +2932,27 @@
     </p:spTree>
     <p:extLst>
       <p:ext uri="{BB962C8B-B14F-4D97-AF65-F5344CB8AC3E}">
-        <p14:creationId xmlns:p14="http://schemas.microsoft.com/office/powerpoint/2010/main" val="1834496264"/>
+        <p14:creationId xmlns:p14="http://schemas.microsoft.com/office/powerpoint/2010/main" val="2971144203"/>
       </p:ext>
     </p:extLst>
   </p:cSld>
   <p:clrMap bg1="lt1" tx1="dk1" bg2="lt2" tx2="dk2" accent1="accent1" accent2="accent2" accent3="accent3" accent4="accent4" accent5="accent5" accent6="accent6" hlink="hlink" folHlink="folHlink"/>
   <p:sldLayoutIdLst>
-    <p:sldLayoutId id="2147483673" r:id="rId1"/>
-    <p:sldLayoutId id="2147483674" r:id="rId2"/>
-    <p:sldLayoutId id="2147483675" r:id="rId3"/>
-    <p:sldLayoutId id="2147483676" r:id="rId4"/>
-    <p:sldLayoutId id="2147483677" r:id="rId5"/>
-    <p:sldLayoutId id="2147483678" r:id="rId6"/>
-    <p:sldLayoutId id="2147483679" r:id="rId7"/>
-    <p:sldLayoutId id="2147483680" r:id="rId8"/>
-    <p:sldLayoutId id="2147483681" r:id="rId9"/>
-    <p:sldLayoutId id="2147483682" r:id="rId10"/>
-    <p:sldLayoutId id="2147483683" r:id="rId11"/>
+    <p:sldLayoutId id="2147483685" r:id="rId1"/>
+    <p:sldLayoutId id="2147483686" r:id="rId2"/>
+    <p:sldLayoutId id="2147483687" r:id="rId3"/>
+    <p:sldLayoutId id="2147483688" r:id="rId4"/>
+    <p:sldLayoutId id="2147483689" r:id="rId5"/>
+    <p:sldLayoutId id="2147483690" r:id="rId6"/>
+    <p:sldLayoutId id="2147483691" r:id="rId7"/>
+    <p:sldLayoutId id="2147483692" r:id="rId8"/>
+    <p:sldLayoutId id="2147483693" r:id="rId9"/>
+    <p:sldLayoutId id="2147483694" r:id="rId10"/>
+    <p:sldLayoutId id="2147483695" r:id="rId11"/>
   </p:sldLayoutIdLst>
   <p:txStyles>
     <p:titleStyle>
-      <a:lvl1pPr algn="l" defTabSz="365760" rtl="0" eaLnBrk="1" latinLnBrk="0" hangingPunct="1">
+      <a:lvl1pPr algn="l" defTabSz="378013" rtl="0" eaLnBrk="1" latinLnBrk="0" hangingPunct="1">
         <a:lnSpc>
           <a:spcPct val="90000"/>
         </a:lnSpc>
@@ -2896,7 +2960,7 @@
           <a:spcPct val="0"/>
         </a:spcBef>
         <a:buNone/>
-        <a:defRPr sz="1760" kern="1200">
+        <a:defRPr sz="1819" kern="1200">
           <a:solidFill>
             <a:schemeClr val="tx1"/>
           </a:solidFill>
@@ -2907,16 +2971,16 @@
       </a:lvl1pPr>
     </p:titleStyle>
     <p:bodyStyle>
-      <a:lvl1pPr marL="91440" indent="-91440" algn="l" defTabSz="365760" rtl="0" eaLnBrk="1" latinLnBrk="0" hangingPunct="1">
+      <a:lvl1pPr marL="94503" indent="-94503" algn="l" defTabSz="378013" rtl="0" eaLnBrk="1" latinLnBrk="0" hangingPunct="1">
         <a:lnSpc>
           <a:spcPct val="90000"/>
         </a:lnSpc>
         <a:spcBef>
-          <a:spcPts val="400"/>
+          <a:spcPts val="413"/>
         </a:spcBef>
         <a:buFont typeface="Arial" panose="020B0604020202020204" pitchFamily="34" charset="0"/>
         <a:buChar char="•"/>
-        <a:defRPr sz="1120" kern="1200">
+        <a:defRPr sz="1158" kern="1200">
           <a:solidFill>
             <a:schemeClr val="tx1"/>
           </a:solidFill>
@@ -2925,16 +2989,16 @@
           <a:cs typeface="+mn-cs"/>
         </a:defRPr>
       </a:lvl1pPr>
-      <a:lvl2pPr marL="274320" indent="-91440" algn="l" defTabSz="365760" rtl="0" eaLnBrk="1" latinLnBrk="0" hangingPunct="1">
+      <a:lvl2pPr marL="283510" indent="-94503" algn="l" defTabSz="378013" rtl="0" eaLnBrk="1" latinLnBrk="0" hangingPunct="1">
         <a:lnSpc>
           <a:spcPct val="90000"/>
         </a:lnSpc>
         <a:spcBef>
-          <a:spcPts val="200"/>
+          <a:spcPts val="207"/>
         </a:spcBef>
         <a:buFont typeface="Arial" panose="020B0604020202020204" pitchFamily="34" charset="0"/>
         <a:buChar char="•"/>
-        <a:defRPr sz="960" kern="1200">
+        <a:defRPr sz="992" kern="1200">
           <a:solidFill>
             <a:schemeClr val="tx1"/>
           </a:solidFill>
@@ -2943,16 +3007,16 @@
           <a:cs typeface="+mn-cs"/>
         </a:defRPr>
       </a:lvl2pPr>
-      <a:lvl3pPr marL="457200" indent="-91440" algn="l" defTabSz="365760" rtl="0" eaLnBrk="1" latinLnBrk="0" hangingPunct="1">
+      <a:lvl3pPr marL="472516" indent="-94503" algn="l" defTabSz="378013" rtl="0" eaLnBrk="1" latinLnBrk="0" hangingPunct="1">
         <a:lnSpc>
           <a:spcPct val="90000"/>
         </a:lnSpc>
         <a:spcBef>
-          <a:spcPts val="200"/>
+          <a:spcPts val="207"/>
         </a:spcBef>
         <a:buFont typeface="Arial" panose="020B0604020202020204" pitchFamily="34" charset="0"/>
         <a:buChar char="•"/>
-        <a:defRPr sz="800" kern="1200">
+        <a:defRPr sz="827" kern="1200">
           <a:solidFill>
             <a:schemeClr val="tx1"/>
           </a:solidFill>
@@ -2961,16 +3025,16 @@
           <a:cs typeface="+mn-cs"/>
         </a:defRPr>
       </a:lvl3pPr>
-      <a:lvl4pPr marL="640080" indent="-91440" algn="l" defTabSz="365760" rtl="0" eaLnBrk="1" latinLnBrk="0" hangingPunct="1">
+      <a:lvl4pPr marL="661523" indent="-94503" algn="l" defTabSz="378013" rtl="0" eaLnBrk="1" latinLnBrk="0" hangingPunct="1">
         <a:lnSpc>
           <a:spcPct val="90000"/>
         </a:lnSpc>
         <a:spcBef>
-          <a:spcPts val="200"/>
+          <a:spcPts val="207"/>
         </a:spcBef>
         <a:buFont typeface="Arial" panose="020B0604020202020204" pitchFamily="34" charset="0"/>
         <a:buChar char="•"/>
-        <a:defRPr sz="720" kern="1200">
+        <a:defRPr sz="744" kern="1200">
           <a:solidFill>
             <a:schemeClr val="tx1"/>
           </a:solidFill>
@@ -2979,16 +3043,16 @@
           <a:cs typeface="+mn-cs"/>
         </a:defRPr>
       </a:lvl4pPr>
-      <a:lvl5pPr marL="822960" indent="-91440" algn="l" defTabSz="365760" rtl="0" eaLnBrk="1" latinLnBrk="0" hangingPunct="1">
+      <a:lvl5pPr marL="850529" indent="-94503" algn="l" defTabSz="378013" rtl="0" eaLnBrk="1" latinLnBrk="0" hangingPunct="1">
         <a:lnSpc>
           <a:spcPct val="90000"/>
         </a:lnSpc>
         <a:spcBef>
-          <a:spcPts val="200"/>
+          <a:spcPts val="207"/>
         </a:spcBef>
         <a:buFont typeface="Arial" panose="020B0604020202020204" pitchFamily="34" charset="0"/>
         <a:buChar char="•"/>
-        <a:defRPr sz="720" kern="1200">
+        <a:defRPr sz="744" kern="1200">
           <a:solidFill>
             <a:schemeClr val="tx1"/>
           </a:solidFill>
@@ -2997,16 +3061,16 @@
           <a:cs typeface="+mn-cs"/>
         </a:defRPr>
       </a:lvl5pPr>
-      <a:lvl6pPr marL="1005840" indent="-91440" algn="l" defTabSz="365760" rtl="0" eaLnBrk="1" latinLnBrk="0" hangingPunct="1">
+      <a:lvl6pPr marL="1039536" indent="-94503" algn="l" defTabSz="378013" rtl="0" eaLnBrk="1" latinLnBrk="0" hangingPunct="1">
         <a:lnSpc>
           <a:spcPct val="90000"/>
         </a:lnSpc>
         <a:spcBef>
-          <a:spcPts val="200"/>
+          <a:spcPts val="207"/>
         </a:spcBef>
         <a:buFont typeface="Arial" panose="020B0604020202020204" pitchFamily="34" charset="0"/>
         <a:buChar char="•"/>
-        <a:defRPr sz="720" kern="1200">
+        <a:defRPr sz="744" kern="1200">
           <a:solidFill>
             <a:schemeClr val="tx1"/>
           </a:solidFill>
@@ -3015,16 +3079,16 @@
           <a:cs typeface="+mn-cs"/>
         </a:defRPr>
       </a:lvl6pPr>
-      <a:lvl7pPr marL="1188720" indent="-91440" algn="l" defTabSz="365760" rtl="0" eaLnBrk="1" latinLnBrk="0" hangingPunct="1">
+      <a:lvl7pPr marL="1228542" indent="-94503" algn="l" defTabSz="378013" rtl="0" eaLnBrk="1" latinLnBrk="0" hangingPunct="1">
         <a:lnSpc>
           <a:spcPct val="90000"/>
         </a:lnSpc>
         <a:spcBef>
-          <a:spcPts val="200"/>
+          <a:spcPts val="207"/>
         </a:spcBef>
         <a:buFont typeface="Arial" panose="020B0604020202020204" pitchFamily="34" charset="0"/>
         <a:buChar char="•"/>
-        <a:defRPr sz="720" kern="1200">
+        <a:defRPr sz="744" kern="1200">
           <a:solidFill>
             <a:schemeClr val="tx1"/>
           </a:solidFill>
@@ -3033,16 +3097,16 @@
           <a:cs typeface="+mn-cs"/>
         </a:defRPr>
       </a:lvl7pPr>
-      <a:lvl8pPr marL="1371600" indent="-91440" algn="l" defTabSz="365760" rtl="0" eaLnBrk="1" latinLnBrk="0" hangingPunct="1">
+      <a:lvl8pPr marL="1417549" indent="-94503" algn="l" defTabSz="378013" rtl="0" eaLnBrk="1" latinLnBrk="0" hangingPunct="1">
         <a:lnSpc>
           <a:spcPct val="90000"/>
         </a:lnSpc>
         <a:spcBef>
-          <a:spcPts val="200"/>
+          <a:spcPts val="207"/>
         </a:spcBef>
         <a:buFont typeface="Arial" panose="020B0604020202020204" pitchFamily="34" charset="0"/>
         <a:buChar char="•"/>
-        <a:defRPr sz="720" kern="1200">
+        <a:defRPr sz="744" kern="1200">
           <a:solidFill>
             <a:schemeClr val="tx1"/>
           </a:solidFill>
@@ -3051,16 +3115,16 @@
           <a:cs typeface="+mn-cs"/>
         </a:defRPr>
       </a:lvl8pPr>
-      <a:lvl9pPr marL="1554480" indent="-91440" algn="l" defTabSz="365760" rtl="0" eaLnBrk="1" latinLnBrk="0" hangingPunct="1">
+      <a:lvl9pPr marL="1606555" indent="-94503" algn="l" defTabSz="378013" rtl="0" eaLnBrk="1" latinLnBrk="0" hangingPunct="1">
         <a:lnSpc>
           <a:spcPct val="90000"/>
         </a:lnSpc>
         <a:spcBef>
-          <a:spcPts val="200"/>
+          <a:spcPts val="207"/>
         </a:spcBef>
         <a:buFont typeface="Arial" panose="020B0604020202020204" pitchFamily="34" charset="0"/>
         <a:buChar char="•"/>
-        <a:defRPr sz="720" kern="1200">
+        <a:defRPr sz="744" kern="1200">
           <a:solidFill>
             <a:schemeClr val="tx1"/>
           </a:solidFill>
@@ -3074,8 +3138,8 @@
       <a:defPPr>
         <a:defRPr lang="en-US"/>
       </a:defPPr>
-      <a:lvl1pPr marL="0" algn="l" defTabSz="365760" rtl="0" eaLnBrk="1" latinLnBrk="0" hangingPunct="1">
-        <a:defRPr sz="720" kern="1200">
+      <a:lvl1pPr marL="0" algn="l" defTabSz="378013" rtl="0" eaLnBrk="1" latinLnBrk="0" hangingPunct="1">
+        <a:defRPr sz="744" kern="1200">
           <a:solidFill>
             <a:schemeClr val="tx1"/>
           </a:solidFill>
@@ -3084,8 +3148,8 @@
           <a:cs typeface="+mn-cs"/>
         </a:defRPr>
       </a:lvl1pPr>
-      <a:lvl2pPr marL="182880" algn="l" defTabSz="365760" rtl="0" eaLnBrk="1" latinLnBrk="0" hangingPunct="1">
-        <a:defRPr sz="720" kern="1200">
+      <a:lvl2pPr marL="189006" algn="l" defTabSz="378013" rtl="0" eaLnBrk="1" latinLnBrk="0" hangingPunct="1">
+        <a:defRPr sz="744" kern="1200">
           <a:solidFill>
             <a:schemeClr val="tx1"/>
           </a:solidFill>
@@ -3094,8 +3158,8 @@
           <a:cs typeface="+mn-cs"/>
         </a:defRPr>
       </a:lvl2pPr>
-      <a:lvl3pPr marL="365760" algn="l" defTabSz="365760" rtl="0" eaLnBrk="1" latinLnBrk="0" hangingPunct="1">
-        <a:defRPr sz="720" kern="1200">
+      <a:lvl3pPr marL="378013" algn="l" defTabSz="378013" rtl="0" eaLnBrk="1" latinLnBrk="0" hangingPunct="1">
+        <a:defRPr sz="744" kern="1200">
           <a:solidFill>
             <a:schemeClr val="tx1"/>
           </a:solidFill>
@@ -3104,8 +3168,8 @@
           <a:cs typeface="+mn-cs"/>
         </a:defRPr>
       </a:lvl3pPr>
-      <a:lvl4pPr marL="548640" algn="l" defTabSz="365760" rtl="0" eaLnBrk="1" latinLnBrk="0" hangingPunct="1">
-        <a:defRPr sz="720" kern="1200">
+      <a:lvl4pPr marL="567019" algn="l" defTabSz="378013" rtl="0" eaLnBrk="1" latinLnBrk="0" hangingPunct="1">
+        <a:defRPr sz="744" kern="1200">
           <a:solidFill>
             <a:schemeClr val="tx1"/>
           </a:solidFill>
@@ -3114,8 +3178,8 @@
           <a:cs typeface="+mn-cs"/>
         </a:defRPr>
       </a:lvl4pPr>
-      <a:lvl5pPr marL="731520" algn="l" defTabSz="365760" rtl="0" eaLnBrk="1" latinLnBrk="0" hangingPunct="1">
-        <a:defRPr sz="720" kern="1200">
+      <a:lvl5pPr marL="756026" algn="l" defTabSz="378013" rtl="0" eaLnBrk="1" latinLnBrk="0" hangingPunct="1">
+        <a:defRPr sz="744" kern="1200">
           <a:solidFill>
             <a:schemeClr val="tx1"/>
           </a:solidFill>
@@ -3124,8 +3188,8 @@
           <a:cs typeface="+mn-cs"/>
         </a:defRPr>
       </a:lvl5pPr>
-      <a:lvl6pPr marL="914400" algn="l" defTabSz="365760" rtl="0" eaLnBrk="1" latinLnBrk="0" hangingPunct="1">
-        <a:defRPr sz="720" kern="1200">
+      <a:lvl6pPr marL="945032" algn="l" defTabSz="378013" rtl="0" eaLnBrk="1" latinLnBrk="0" hangingPunct="1">
+        <a:defRPr sz="744" kern="1200">
           <a:solidFill>
             <a:schemeClr val="tx1"/>
           </a:solidFill>
@@ -3134,8 +3198,8 @@
           <a:cs typeface="+mn-cs"/>
         </a:defRPr>
       </a:lvl6pPr>
-      <a:lvl7pPr marL="1097280" algn="l" defTabSz="365760" rtl="0" eaLnBrk="1" latinLnBrk="0" hangingPunct="1">
-        <a:defRPr sz="720" kern="1200">
+      <a:lvl7pPr marL="1134039" algn="l" defTabSz="378013" rtl="0" eaLnBrk="1" latinLnBrk="0" hangingPunct="1">
+        <a:defRPr sz="744" kern="1200">
           <a:solidFill>
             <a:schemeClr val="tx1"/>
           </a:solidFill>
@@ -3144,8 +3208,8 @@
           <a:cs typeface="+mn-cs"/>
         </a:defRPr>
       </a:lvl7pPr>
-      <a:lvl8pPr marL="1280160" algn="l" defTabSz="365760" rtl="0" eaLnBrk="1" latinLnBrk="0" hangingPunct="1">
-        <a:defRPr sz="720" kern="1200">
+      <a:lvl8pPr marL="1323045" algn="l" defTabSz="378013" rtl="0" eaLnBrk="1" latinLnBrk="0" hangingPunct="1">
+        <a:defRPr sz="744" kern="1200">
           <a:solidFill>
             <a:schemeClr val="tx1"/>
           </a:solidFill>
@@ -3154,8 +3218,8 @@
           <a:cs typeface="+mn-cs"/>
         </a:defRPr>
       </a:lvl8pPr>
-      <a:lvl9pPr marL="1463040" algn="l" defTabSz="365760" rtl="0" eaLnBrk="1" latinLnBrk="0" hangingPunct="1">
-        <a:defRPr sz="720" kern="1200">
+      <a:lvl9pPr marL="1512052" algn="l" defTabSz="378013" rtl="0" eaLnBrk="1" latinLnBrk="0" hangingPunct="1">
+        <a:defRPr sz="744" kern="1200">
           <a:solidFill>
             <a:schemeClr val="tx1"/>
           </a:solidFill>
@@ -3186,48 +3250,12 @@
           <a:chExt cx="0" cy="0"/>
         </a:xfrm>
       </p:grpSpPr>
-      <p:pic>
-        <p:nvPicPr>
-          <p:cNvPr id="7" name="Picture 6">
+      <p:grpSp>
+        <p:nvGrpSpPr>
+          <p:cNvPr id="26" name="Group 25">
             <a:extLst>
               <a:ext uri="{FF2B5EF4-FFF2-40B4-BE49-F238E27FC236}">
-                <a16:creationId xmlns:a16="http://schemas.microsoft.com/office/drawing/2014/main" id="{F04D2091-A806-2637-0954-106CFA39FEB5}"/>
-              </a:ext>
-            </a:extLst>
-          </p:cNvPr>
-          <p:cNvPicPr>
-            <a:picLocks noChangeAspect="1"/>
-          </p:cNvPicPr>
-          <p:nvPr/>
-        </p:nvPicPr>
-        <p:blipFill>
-          <a:blip r:embed="rId2">
-            <a:extLst>
-              <a:ext uri="{28A0092B-C50C-407E-A947-70E740481C1C}">
-                <a14:useLocalDpi xmlns:a14="http://schemas.microsoft.com/office/drawing/2010/main" val="0"/>
-              </a:ext>
-            </a:extLst>
-          </a:blip>
-          <a:stretch>
-            <a:fillRect/>
-          </a:stretch>
-        </p:blipFill>
-        <p:spPr>
-          <a:xfrm>
-            <a:off x="2551176" y="0"/>
-            <a:ext cx="3657599" cy="2743200"/>
-          </a:xfrm>
-          <a:prstGeom prst="rect">
-            <a:avLst/>
-          </a:prstGeom>
-        </p:spPr>
-      </p:pic>
-      <p:grpSp>
-        <p:nvGrpSpPr>
-          <p:cNvPr id="9" name="Group 8">
-            <a:extLst>
-              <a:ext uri="{FF2B5EF4-FFF2-40B4-BE49-F238E27FC236}">
-                <a16:creationId xmlns:a16="http://schemas.microsoft.com/office/drawing/2014/main" id="{7193D5A7-DBCC-74DE-21F4-FFC20B0F4636}"/>
+                <a16:creationId xmlns:a16="http://schemas.microsoft.com/office/drawing/2014/main" id="{C414198B-DF3E-8F1E-EC61-C138F684EEE4}"/>
               </a:ext>
             </a:extLst>
           </p:cNvPr>
@@ -3236,18 +3264,18 @@
         </p:nvGrpSpPr>
         <p:grpSpPr>
           <a:xfrm>
-            <a:off x="0" y="0"/>
-            <a:ext cx="2674684" cy="2743206"/>
+            <a:off x="45720" y="45720"/>
+            <a:ext cx="6208775" cy="2743206"/>
             <a:chOff x="0" y="0"/>
-            <a:chExt cx="2674684" cy="2743206"/>
+            <a:chExt cx="6208775" cy="2743206"/>
           </a:xfrm>
         </p:grpSpPr>
         <p:pic>
           <p:nvPicPr>
-            <p:cNvPr id="10" name="Picture 9">
+            <p:cNvPr id="27" name="Picture 26">
               <a:extLst>
                 <a:ext uri="{FF2B5EF4-FFF2-40B4-BE49-F238E27FC236}">
-                  <a16:creationId xmlns:a16="http://schemas.microsoft.com/office/drawing/2014/main" id="{1A3D6F70-6D77-1AE7-42F9-DA3BE6DA71F6}"/>
+                  <a16:creationId xmlns:a16="http://schemas.microsoft.com/office/drawing/2014/main" id="{F04D2091-A806-2637-0954-106CFA39FEB5}"/>
                 </a:ext>
               </a:extLst>
             </p:cNvPr>
@@ -3257,7 +3285,7 @@
             <p:nvPr/>
           </p:nvPicPr>
           <p:blipFill>
-            <a:blip r:embed="rId3">
+            <a:blip r:embed="rId2">
               <a:extLst>
                 <a:ext uri="{28A0092B-C50C-407E-A947-70E740481C1C}">
                   <a14:useLocalDpi xmlns:a14="http://schemas.microsoft.com/office/drawing/2010/main" val="0"/>
@@ -3270,20 +3298,312 @@
           </p:blipFill>
           <p:spPr>
             <a:xfrm>
-              <a:off x="0" y="0"/>
-              <a:ext cx="2286005" cy="2743206"/>
+              <a:off x="2551176" y="0"/>
+              <a:ext cx="3657599" cy="2743200"/>
             </a:xfrm>
             <a:prstGeom prst="rect">
               <a:avLst/>
             </a:prstGeom>
           </p:spPr>
         </p:pic>
+        <p:grpSp>
+          <p:nvGrpSpPr>
+            <p:cNvPr id="28" name="Group 27">
+              <a:extLst>
+                <a:ext uri="{FF2B5EF4-FFF2-40B4-BE49-F238E27FC236}">
+                  <a16:creationId xmlns:a16="http://schemas.microsoft.com/office/drawing/2014/main" id="{7193D5A7-DBCC-74DE-21F4-FFC20B0F4636}"/>
+                </a:ext>
+              </a:extLst>
+            </p:cNvPr>
+            <p:cNvGrpSpPr/>
+            <p:nvPr/>
+          </p:nvGrpSpPr>
+          <p:grpSpPr>
+            <a:xfrm>
+              <a:off x="0" y="0"/>
+              <a:ext cx="2674684" cy="2743206"/>
+              <a:chOff x="0" y="0"/>
+              <a:chExt cx="2674684" cy="2743206"/>
+            </a:xfrm>
+          </p:grpSpPr>
+          <p:pic>
+            <p:nvPicPr>
+              <p:cNvPr id="31" name="Picture 30">
+                <a:extLst>
+                  <a:ext uri="{FF2B5EF4-FFF2-40B4-BE49-F238E27FC236}">
+                    <a16:creationId xmlns:a16="http://schemas.microsoft.com/office/drawing/2014/main" id="{1A3D6F70-6D77-1AE7-42F9-DA3BE6DA71F6}"/>
+                  </a:ext>
+                </a:extLst>
+              </p:cNvPr>
+              <p:cNvPicPr>
+                <a:picLocks noChangeAspect="1"/>
+              </p:cNvPicPr>
+              <p:nvPr/>
+            </p:nvPicPr>
+            <p:blipFill>
+              <a:blip r:embed="rId3">
+                <a:extLst>
+                  <a:ext uri="{28A0092B-C50C-407E-A947-70E740481C1C}">
+                    <a14:useLocalDpi xmlns:a14="http://schemas.microsoft.com/office/drawing/2010/main" val="0"/>
+                  </a:ext>
+                </a:extLst>
+              </a:blip>
+              <a:stretch>
+                <a:fillRect/>
+              </a:stretch>
+            </p:blipFill>
+            <p:spPr>
+              <a:xfrm>
+                <a:off x="0" y="0"/>
+                <a:ext cx="2286005" cy="2743206"/>
+              </a:xfrm>
+              <a:prstGeom prst="rect">
+                <a:avLst/>
+              </a:prstGeom>
+            </p:spPr>
+          </p:pic>
+          <p:sp>
+            <p:nvSpPr>
+              <p:cNvPr id="32" name="Rectangle 31">
+                <a:extLst>
+                  <a:ext uri="{FF2B5EF4-FFF2-40B4-BE49-F238E27FC236}">
+                    <a16:creationId xmlns:a16="http://schemas.microsoft.com/office/drawing/2014/main" id="{F2303B2F-7855-2234-5DCE-49175B3E485C}"/>
+                  </a:ext>
+                </a:extLst>
+              </p:cNvPr>
+              <p:cNvSpPr/>
+              <p:nvPr/>
+            </p:nvSpPr>
+            <p:spPr>
+              <a:xfrm>
+                <a:off x="721044" y="658815"/>
+                <a:ext cx="1517341" cy="495300"/>
+              </a:xfrm>
+              <a:prstGeom prst="rect">
+                <a:avLst/>
+              </a:prstGeom>
+              <a:noFill/>
+              <a:ln>
+                <a:noFill/>
+              </a:ln>
+            </p:spPr>
+            <p:style>
+              <a:lnRef idx="2">
+                <a:schemeClr val="accent1">
+                  <a:shade val="15000"/>
+                </a:schemeClr>
+              </a:lnRef>
+              <a:fillRef idx="1">
+                <a:schemeClr val="accent1"/>
+              </a:fillRef>
+              <a:effectRef idx="0">
+                <a:schemeClr val="accent1"/>
+              </a:effectRef>
+              <a:fontRef idx="minor">
+                <a:schemeClr val="lt1"/>
+              </a:fontRef>
+            </p:style>
+            <p:txBody>
+              <a:bodyPr rtlCol="0" anchor="ctr"/>
+              <a:lstStyle/>
+              <a:p>
+                <a:pPr algn="ctr"/>
+                <a:r>
+                  <a:rPr lang="en-US" sz="900" b="1" dirty="0">
+                    <a:solidFill>
+                      <a:srgbClr val="178F92"/>
+                    </a:solidFill>
+                    <a:latin typeface="Arial" panose="020B0604020202020204" pitchFamily="34" charset="0"/>
+                    <a:cs typeface="Arial" panose="020B0604020202020204" pitchFamily="34" charset="0"/>
+                  </a:rPr>
+                  <a:t>−92% change in probability of detection</a:t>
+                </a:r>
+              </a:p>
+            </p:txBody>
+          </p:sp>
+          <p:sp>
+            <p:nvSpPr>
+              <p:cNvPr id="33" name="Rectangle 32">
+                <a:extLst>
+                  <a:ext uri="{FF2B5EF4-FFF2-40B4-BE49-F238E27FC236}">
+                    <a16:creationId xmlns:a16="http://schemas.microsoft.com/office/drawing/2014/main" id="{23D28CC5-98A5-7313-8144-8F4C609648A5}"/>
+                  </a:ext>
+                </a:extLst>
+              </p:cNvPr>
+              <p:cNvSpPr/>
+              <p:nvPr/>
+            </p:nvSpPr>
+            <p:spPr>
+              <a:xfrm>
+                <a:off x="984252" y="1062038"/>
+                <a:ext cx="1517341" cy="495300"/>
+              </a:xfrm>
+              <a:prstGeom prst="rect">
+                <a:avLst/>
+              </a:prstGeom>
+              <a:noFill/>
+              <a:ln>
+                <a:noFill/>
+              </a:ln>
+            </p:spPr>
+            <p:style>
+              <a:lnRef idx="2">
+                <a:schemeClr val="accent1">
+                  <a:shade val="15000"/>
+                </a:schemeClr>
+              </a:lnRef>
+              <a:fillRef idx="1">
+                <a:schemeClr val="accent1"/>
+              </a:fillRef>
+              <a:effectRef idx="0">
+                <a:schemeClr val="accent1"/>
+              </a:effectRef>
+              <a:fontRef idx="minor">
+                <a:schemeClr val="lt1"/>
+              </a:fontRef>
+            </p:style>
+            <p:txBody>
+              <a:bodyPr rtlCol="0" anchor="ctr"/>
+              <a:lstStyle/>
+              <a:p>
+                <a:r>
+                  <a:rPr lang="en-US" sz="900" b="1" dirty="0">
+                    <a:solidFill>
+                      <a:srgbClr val="AE8548"/>
+                    </a:solidFill>
+                    <a:latin typeface="Arial" panose="020B0604020202020204" pitchFamily="34" charset="0"/>
+                    <a:cs typeface="Arial" panose="020B0604020202020204" pitchFamily="34" charset="0"/>
+                  </a:rPr>
+                  <a:t>−83% change in probability of detection</a:t>
+                </a:r>
+              </a:p>
+            </p:txBody>
+          </p:sp>
+          <p:sp>
+            <p:nvSpPr>
+              <p:cNvPr id="34" name="Rectangle 33">
+                <a:extLst>
+                  <a:ext uri="{FF2B5EF4-FFF2-40B4-BE49-F238E27FC236}">
+                    <a16:creationId xmlns:a16="http://schemas.microsoft.com/office/drawing/2014/main" id="{7C455A33-8E9F-43F4-ECC8-63F2B41EDAF9}"/>
+                  </a:ext>
+                </a:extLst>
+              </p:cNvPr>
+              <p:cNvSpPr/>
+              <p:nvPr/>
+            </p:nvSpPr>
+            <p:spPr>
+              <a:xfrm>
+                <a:off x="58135" y="57150"/>
+                <a:ext cx="131297" cy="152639"/>
+              </a:xfrm>
+              <a:prstGeom prst="rect">
+                <a:avLst/>
+              </a:prstGeom>
+              <a:noFill/>
+              <a:ln>
+                <a:noFill/>
+              </a:ln>
+            </p:spPr>
+            <p:style>
+              <a:lnRef idx="2">
+                <a:schemeClr val="accent1">
+                  <a:shade val="15000"/>
+                </a:schemeClr>
+              </a:lnRef>
+              <a:fillRef idx="1">
+                <a:schemeClr val="accent1"/>
+              </a:fillRef>
+              <a:effectRef idx="0">
+                <a:schemeClr val="accent1"/>
+              </a:effectRef>
+              <a:fontRef idx="minor">
+                <a:schemeClr val="lt1"/>
+              </a:fontRef>
+            </p:style>
+            <p:txBody>
+              <a:bodyPr rtlCol="0" anchor="ctr"/>
+              <a:lstStyle/>
+              <a:p>
+                <a:pPr algn="ctr"/>
+                <a:r>
+                  <a:rPr lang="en-US" sz="900" b="1" dirty="0">
+                    <a:solidFill>
+                      <a:schemeClr val="tx1"/>
+                    </a:solidFill>
+                    <a:latin typeface="Arial" panose="020B0604020202020204" pitchFamily="34" charset="0"/>
+                    <a:cs typeface="Arial" panose="020B0604020202020204" pitchFamily="34" charset="0"/>
+                  </a:rPr>
+                  <a:t>A</a:t>
+                </a:r>
+              </a:p>
+            </p:txBody>
+          </p:sp>
+          <p:sp>
+            <p:nvSpPr>
+              <p:cNvPr id="35" name="Rectangle 34">
+                <a:extLst>
+                  <a:ext uri="{FF2B5EF4-FFF2-40B4-BE49-F238E27FC236}">
+                    <a16:creationId xmlns:a16="http://schemas.microsoft.com/office/drawing/2014/main" id="{0046218C-8D04-61E7-04F4-ABDCFCC46A32}"/>
+                  </a:ext>
+                </a:extLst>
+              </p:cNvPr>
+              <p:cNvSpPr/>
+              <p:nvPr/>
+            </p:nvSpPr>
+            <p:spPr>
+              <a:xfrm>
+                <a:off x="2543387" y="57149"/>
+                <a:ext cx="131297" cy="152639"/>
+              </a:xfrm>
+              <a:prstGeom prst="rect">
+                <a:avLst/>
+              </a:prstGeom>
+              <a:noFill/>
+              <a:ln>
+                <a:noFill/>
+              </a:ln>
+            </p:spPr>
+            <p:style>
+              <a:lnRef idx="2">
+                <a:schemeClr val="accent1">
+                  <a:shade val="15000"/>
+                </a:schemeClr>
+              </a:lnRef>
+              <a:fillRef idx="1">
+                <a:schemeClr val="accent1"/>
+              </a:fillRef>
+              <a:effectRef idx="0">
+                <a:schemeClr val="accent1"/>
+              </a:effectRef>
+              <a:fontRef idx="minor">
+                <a:schemeClr val="lt1"/>
+              </a:fontRef>
+            </p:style>
+            <p:txBody>
+              <a:bodyPr rtlCol="0" anchor="ctr"/>
+              <a:lstStyle/>
+              <a:p>
+                <a:pPr algn="ctr"/>
+                <a:r>
+                  <a:rPr lang="en-US" sz="900" b="1" dirty="0">
+                    <a:solidFill>
+                      <a:schemeClr val="tx1"/>
+                    </a:solidFill>
+                    <a:latin typeface="Arial" panose="020B0604020202020204" pitchFamily="34" charset="0"/>
+                    <a:cs typeface="Arial" panose="020B0604020202020204" pitchFamily="34" charset="0"/>
+                  </a:rPr>
+                  <a:t>B</a:t>
+                </a:r>
+              </a:p>
+            </p:txBody>
+          </p:sp>
+        </p:grpSp>
         <p:sp>
           <p:nvSpPr>
-            <p:cNvPr id="12" name="Rectangle 11">
+            <p:cNvPr id="29" name="Rectangle 28">
               <a:extLst>
                 <a:ext uri="{FF2B5EF4-FFF2-40B4-BE49-F238E27FC236}">
-                  <a16:creationId xmlns:a16="http://schemas.microsoft.com/office/drawing/2014/main" id="{F2303B2F-7855-2234-5DCE-49175B3E485C}"/>
+                  <a16:creationId xmlns:a16="http://schemas.microsoft.com/office/drawing/2014/main" id="{85F16C4B-9537-1AF0-FDC9-59BF9F4F5919}"/>
                 </a:ext>
               </a:extLst>
             </p:cNvPr>
@@ -3292,15 +3612,21 @@
           </p:nvSpPr>
           <p:spPr>
             <a:xfrm>
-              <a:off x="721044" y="658815"/>
-              <a:ext cx="1517341" cy="495300"/>
+              <a:off x="1" y="0"/>
+              <a:ext cx="2400300" cy="2743200"/>
             </a:xfrm>
             <a:prstGeom prst="rect">
               <a:avLst/>
             </a:prstGeom>
-            <a:noFill/>
-            <a:ln>
-              <a:noFill/>
+            <a:solidFill>
+              <a:schemeClr val="accent1">
+                <a:alpha val="0"/>
+              </a:schemeClr>
+            </a:solidFill>
+            <a:ln w="6350">
+              <a:solidFill>
+                <a:schemeClr val="tx1"/>
+              </a:solidFill>
             </a:ln>
           </p:spPr>
           <p:style>
@@ -3324,25 +3650,16 @@
             <a:lstStyle/>
             <a:p>
               <a:pPr algn="ctr"/>
-              <a:r>
-                <a:rPr lang="en-US" sz="900" b="1" dirty="0">
-                  <a:solidFill>
-                    <a:srgbClr val="178F92"/>
-                  </a:solidFill>
-                  <a:latin typeface="Arial" panose="020B0604020202020204" pitchFamily="34" charset="0"/>
-                  <a:cs typeface="Arial" panose="020B0604020202020204" pitchFamily="34" charset="0"/>
-                </a:rPr>
-                <a:t>−92% change in probability of detection</a:t>
-              </a:r>
+              <a:endParaRPr lang="en-US" b="1" dirty="0"/>
             </a:p>
           </p:txBody>
         </p:sp>
         <p:sp>
           <p:nvSpPr>
-            <p:cNvPr id="20" name="Rectangle 19">
+            <p:cNvPr id="30" name="Rectangle 29">
               <a:extLst>
                 <a:ext uri="{FF2B5EF4-FFF2-40B4-BE49-F238E27FC236}">
-                  <a16:creationId xmlns:a16="http://schemas.microsoft.com/office/drawing/2014/main" id="{23D28CC5-98A5-7313-8144-8F4C609648A5}"/>
+                  <a16:creationId xmlns:a16="http://schemas.microsoft.com/office/drawing/2014/main" id="{D13F5E40-BA00-6966-FFE8-60CA82EF3209}"/>
                 </a:ext>
               </a:extLst>
             </p:cNvPr>
@@ -3351,73 +3668,21 @@
           </p:nvSpPr>
           <p:spPr>
             <a:xfrm>
-              <a:off x="984252" y="1062038"/>
-              <a:ext cx="1517341" cy="495300"/>
+              <a:off x="2449884" y="0"/>
+              <a:ext cx="3730752" cy="2743200"/>
             </a:xfrm>
             <a:prstGeom prst="rect">
               <a:avLst/>
             </a:prstGeom>
-            <a:noFill/>
-            <a:ln>
-              <a:noFill/>
-            </a:ln>
-          </p:spPr>
-          <p:style>
-            <a:lnRef idx="2">
+            <a:solidFill>
               <a:schemeClr val="accent1">
-                <a:shade val="15000"/>
+                <a:alpha val="0"/>
               </a:schemeClr>
-            </a:lnRef>
-            <a:fillRef idx="1">
-              <a:schemeClr val="accent1"/>
-            </a:fillRef>
-            <a:effectRef idx="0">
-              <a:schemeClr val="accent1"/>
-            </a:effectRef>
-            <a:fontRef idx="minor">
-              <a:schemeClr val="lt1"/>
-            </a:fontRef>
-          </p:style>
-          <p:txBody>
-            <a:bodyPr rtlCol="0" anchor="ctr"/>
-            <a:lstStyle/>
-            <a:p>
-              <a:r>
-                <a:rPr lang="en-US" sz="900" b="1" dirty="0">
-                  <a:solidFill>
-                    <a:srgbClr val="AE8548"/>
-                  </a:solidFill>
-                  <a:latin typeface="Arial" panose="020B0604020202020204" pitchFamily="34" charset="0"/>
-                  <a:cs typeface="Arial" panose="020B0604020202020204" pitchFamily="34" charset="0"/>
-                </a:rPr>
-                <a:t>−83% change in probability of detection</a:t>
-              </a:r>
-            </a:p>
-          </p:txBody>
-        </p:sp>
-        <p:sp>
-          <p:nvSpPr>
-            <p:cNvPr id="21" name="Rectangle 20">
-              <a:extLst>
-                <a:ext uri="{FF2B5EF4-FFF2-40B4-BE49-F238E27FC236}">
-                  <a16:creationId xmlns:a16="http://schemas.microsoft.com/office/drawing/2014/main" id="{7C455A33-8E9F-43F4-ECC8-63F2B41EDAF9}"/>
-                </a:ext>
-              </a:extLst>
-            </p:cNvPr>
-            <p:cNvSpPr/>
-            <p:nvPr/>
-          </p:nvSpPr>
-          <p:spPr>
-            <a:xfrm>
-              <a:off x="58135" y="57150"/>
-              <a:ext cx="131297" cy="152639"/>
-            </a:xfrm>
-            <a:prstGeom prst="rect">
-              <a:avLst/>
-            </a:prstGeom>
-            <a:noFill/>
-            <a:ln>
-              <a:noFill/>
+            </a:solidFill>
+            <a:ln w="6350">
+              <a:solidFill>
+                <a:schemeClr val="tx1"/>
+              </a:solidFill>
             </a:ln>
           </p:spPr>
           <p:style>
@@ -3441,75 +3706,7 @@
             <a:lstStyle/>
             <a:p>
               <a:pPr algn="ctr"/>
-              <a:r>
-                <a:rPr lang="en-US" sz="900" b="1" dirty="0">
-                  <a:solidFill>
-                    <a:schemeClr val="tx1"/>
-                  </a:solidFill>
-                  <a:latin typeface="Arial" panose="020B0604020202020204" pitchFamily="34" charset="0"/>
-                  <a:cs typeface="Arial" panose="020B0604020202020204" pitchFamily="34" charset="0"/>
-                </a:rPr>
-                <a:t>A</a:t>
-              </a:r>
-            </a:p>
-          </p:txBody>
-        </p:sp>
-        <p:sp>
-          <p:nvSpPr>
-            <p:cNvPr id="22" name="Rectangle 21">
-              <a:extLst>
-                <a:ext uri="{FF2B5EF4-FFF2-40B4-BE49-F238E27FC236}">
-                  <a16:creationId xmlns:a16="http://schemas.microsoft.com/office/drawing/2014/main" id="{0046218C-8D04-61E7-04F4-ABDCFCC46A32}"/>
-                </a:ext>
-              </a:extLst>
-            </p:cNvPr>
-            <p:cNvSpPr/>
-            <p:nvPr/>
-          </p:nvSpPr>
-          <p:spPr>
-            <a:xfrm>
-              <a:off x="2543387" y="57149"/>
-              <a:ext cx="131297" cy="152639"/>
-            </a:xfrm>
-            <a:prstGeom prst="rect">
-              <a:avLst/>
-            </a:prstGeom>
-            <a:noFill/>
-            <a:ln>
-              <a:noFill/>
-            </a:ln>
-          </p:spPr>
-          <p:style>
-            <a:lnRef idx="2">
-              <a:schemeClr val="accent1">
-                <a:shade val="15000"/>
-              </a:schemeClr>
-            </a:lnRef>
-            <a:fillRef idx="1">
-              <a:schemeClr val="accent1"/>
-            </a:fillRef>
-            <a:effectRef idx="0">
-              <a:schemeClr val="accent1"/>
-            </a:effectRef>
-            <a:fontRef idx="minor">
-              <a:schemeClr val="lt1"/>
-            </a:fontRef>
-          </p:style>
-          <p:txBody>
-            <a:bodyPr rtlCol="0" anchor="ctr"/>
-            <a:lstStyle/>
-            <a:p>
-              <a:pPr algn="ctr"/>
-              <a:r>
-                <a:rPr lang="en-US" sz="900" b="1" dirty="0">
-                  <a:solidFill>
-                    <a:schemeClr val="tx1"/>
-                  </a:solidFill>
-                  <a:latin typeface="Arial" panose="020B0604020202020204" pitchFamily="34" charset="0"/>
-                  <a:cs typeface="Arial" panose="020B0604020202020204" pitchFamily="34" charset="0"/>
-                </a:rPr>
-                <a:t>B</a:t>
-              </a:r>
+              <a:endParaRPr lang="en-US" b="1" dirty="0"/>
             </a:p>
           </p:txBody>
         </p:sp>
